--- a/curso/pptx/S08.pptx
+++ b/curso/pptx/S08.pptx
@@ -3892,8 +3892,8 @@
         </p:nvSpPr>
         <p:spPr>
           <a:xfrm>
-            <a:off x="640000" y="420000"/>
-            <a:ext cx="10912000" cy="420000"/>
+            <a:off x="10652000" y="380000"/>
+            <a:ext cx="900000" cy="800000"/>
           </a:xfrm>
           <a:prstGeom prst="rect">
             <a:avLst/>
@@ -3908,17 +3908,17 @@
           <a:p>
             <a:pPr>
               <a:spcAft>
-                <a:spcPts val="810"/>
-              </a:spcAft>
-            </a:pPr>
-            <a:r>
-              <a:rPr sz="1800" b="1">
+                <a:spcPts val="1980"/>
+              </a:spcAft>
+            </a:pPr>
+            <a:r>
+              <a:rPr sz="4400" b="0">
                 <a:solidFill>
                   <a:srgbClr val="1F2A44"/>
                 </a:solidFill>
                 <a:latin typeface="Nunito Sans"/>
               </a:rPr>
-              <a:t>🦉 Aula de Filosofía</a:t>
+              <a:t>🙃</a:t>
             </a:r>
           </a:p>
         </p:txBody>

--- a/curso/pptx/S08.pptx
+++ b/curso/pptx/S08.pptx
@@ -473,426 +473,6 @@
     </a:lvl9pPr>
   </p:notesStyle>
 </p:notesMaster>
-</file>
-
-<file path=ppt/notesSlides/notesSlide1.xml><?xml version="1.0" encoding="utf-8"?>
-<p:notes xmlns:a="http://schemas.openxmlformats.org/drawingml/2006/main" xmlns:p="http://schemas.openxmlformats.org/presentationml/2006/main" xmlns:r="http://schemas.openxmlformats.org/officeDocument/2006/relationships">
-  <p:cSld>
-    <p:spTree>
-      <p:nvGrpSpPr>
-        <p:cNvPr id="1" name=""/>
-        <p:cNvGrpSpPr/>
-        <p:nvPr/>
-      </p:nvGrpSpPr>
-      <p:grpSpPr>
-        <a:xfrm>
-          <a:off x="0" y="0"/>
-          <a:ext cx="0" cy="0"/>
-          <a:chOff x="0" y="0"/>
-          <a:chExt cx="0" cy="0"/>
-        </a:xfrm>
-      </p:grpSpPr>
-      <p:sp>
-        <p:nvSpPr>
-          <p:cNvPr id="2" name="Slide Image Placeholder 1"/>
-          <p:cNvSpPr>
-            <a:spLocks noGrp="1"/>
-          </p:cNvSpPr>
-          <p:nvPr>
-            <p:ph type="sldImg" idx="2"/>
-          </p:nvPr>
-        </p:nvSpPr>
-        <p:spPr/>
-      </p:sp>
-      <p:sp>
-        <p:nvSpPr>
-          <p:cNvPr id="3" name="Notes Placeholder 2"/>
-          <p:cNvSpPr>
-            <a:spLocks noGrp="1"/>
-          </p:cNvSpPr>
-          <p:nvPr>
-            <p:ph type="body" idx="3" sz="quarter"/>
-          </p:nvPr>
-        </p:nvSpPr>
-        <p:spPr/>
-        <p:txBody>
-          <a:bodyPr/>
-          <a:lstStyle/>
-          <a:p>
-            <a:r>
-              <a:t>3 minutos. Sin apuntes. Es para recordar, no cuenta para nota.</a:t>
-            </a:r>
-          </a:p>
-        </p:txBody>
-      </p:sp>
-      <p:sp>
-        <p:nvSpPr>
-          <p:cNvPr id="4" name="Slide Number Placeholder 3"/>
-          <p:cNvSpPr>
-            <a:spLocks noGrp="1"/>
-          </p:cNvSpPr>
-          <p:nvPr>
-            <p:ph type="sldNum" idx="5" sz="quarter"/>
-          </p:nvPr>
-        </p:nvSpPr>
-        <p:spPr/>
-      </p:sp>
-    </p:spTree>
-  </p:cSld>
-  <p:clrMapOvr>
-    <a:masterClrMapping/>
-  </p:clrMapOvr>
-</p:notes>
-</file>
-
-<file path=ppt/notesSlides/notesSlide2.xml><?xml version="1.0" encoding="utf-8"?>
-<p:notes xmlns:a="http://schemas.openxmlformats.org/drawingml/2006/main" xmlns:p="http://schemas.openxmlformats.org/presentationml/2006/main" xmlns:r="http://schemas.openxmlformats.org/officeDocument/2006/relationships">
-  <p:cSld>
-    <p:spTree>
-      <p:nvGrpSpPr>
-        <p:cNvPr id="1" name=""/>
-        <p:cNvGrpSpPr/>
-        <p:nvPr/>
-      </p:nvGrpSpPr>
-      <p:grpSpPr>
-        <a:xfrm>
-          <a:off x="0" y="0"/>
-          <a:ext cx="0" cy="0"/>
-          <a:chOff x="0" y="0"/>
-          <a:chExt cx="0" cy="0"/>
-        </a:xfrm>
-      </p:grpSpPr>
-      <p:sp>
-        <p:nvSpPr>
-          <p:cNvPr id="2" name="Slide Image Placeholder 1"/>
-          <p:cNvSpPr>
-            <a:spLocks noGrp="1"/>
-          </p:cNvSpPr>
-          <p:nvPr>
-            <p:ph type="sldImg" idx="2"/>
-          </p:nvPr>
-        </p:nvSpPr>
-        <p:spPr/>
-      </p:sp>
-      <p:sp>
-        <p:nvSpPr>
-          <p:cNvPr id="3" name="Notes Placeholder 2"/>
-          <p:cNvSpPr>
-            <a:spLocks noGrp="1"/>
-          </p:cNvSpPr>
-          <p:nvPr>
-            <p:ph type="body" idx="3" sz="quarter"/>
-          </p:nvPr>
-        </p:nvSpPr>
-        <p:spPr/>
-        <p:txBody>
-          <a:bodyPr/>
-          <a:lstStyle/>
-          <a:p>
-            <a:r>
-              <a:t>3 minutos. Sin apuntes. Es para recordar, no cuenta para nota.</a:t>
-            </a:r>
-          </a:p>
-        </p:txBody>
-      </p:sp>
-      <p:sp>
-        <p:nvSpPr>
-          <p:cNvPr id="4" name="Slide Number Placeholder 3"/>
-          <p:cNvSpPr>
-            <a:spLocks noGrp="1"/>
-          </p:cNvSpPr>
-          <p:nvPr>
-            <p:ph type="sldNum" idx="5" sz="quarter"/>
-          </p:nvPr>
-        </p:nvSpPr>
-        <p:spPr/>
-      </p:sp>
-    </p:spTree>
-  </p:cSld>
-  <p:clrMapOvr>
-    <a:masterClrMapping/>
-  </p:clrMapOvr>
-</p:notes>
-</file>
-
-<file path=ppt/notesSlides/notesSlide3.xml><?xml version="1.0" encoding="utf-8"?>
-<p:notes xmlns:a="http://schemas.openxmlformats.org/drawingml/2006/main" xmlns:p="http://schemas.openxmlformats.org/presentationml/2006/main" xmlns:r="http://schemas.openxmlformats.org/officeDocument/2006/relationships">
-  <p:cSld>
-    <p:spTree>
-      <p:nvGrpSpPr>
-        <p:cNvPr id="1" name=""/>
-        <p:cNvGrpSpPr/>
-        <p:nvPr/>
-      </p:nvGrpSpPr>
-      <p:grpSpPr>
-        <a:xfrm>
-          <a:off x="0" y="0"/>
-          <a:ext cx="0" cy="0"/>
-          <a:chOff x="0" y="0"/>
-          <a:chExt cx="0" cy="0"/>
-        </a:xfrm>
-      </p:grpSpPr>
-      <p:sp>
-        <p:nvSpPr>
-          <p:cNvPr id="2" name="Slide Image Placeholder 1"/>
-          <p:cNvSpPr>
-            <a:spLocks noGrp="1"/>
-          </p:cNvSpPr>
-          <p:nvPr>
-            <p:ph type="sldImg" idx="2"/>
-          </p:nvPr>
-        </p:nvSpPr>
-        <p:spPr/>
-      </p:sp>
-      <p:sp>
-        <p:nvSpPr>
-          <p:cNvPr id="3" name="Notes Placeholder 2"/>
-          <p:cNvSpPr>
-            <a:spLocks noGrp="1"/>
-          </p:cNvSpPr>
-          <p:nvPr>
-            <p:ph type="body" idx="3" sz="quarter"/>
-          </p:nvPr>
-        </p:nvSpPr>
-        <p:spPr/>
-        <p:txBody>
-          <a:bodyPr/>
-          <a:lstStyle/>
-          <a:p>
-            <a:r>
-              <a:t>Nadie tiene que contestar: solo pensarlo.</a:t>
-            </a:r>
-          </a:p>
-        </p:txBody>
-      </p:sp>
-      <p:sp>
-        <p:nvSpPr>
-          <p:cNvPr id="4" name="Slide Number Placeholder 3"/>
-          <p:cNvSpPr>
-            <a:spLocks noGrp="1"/>
-          </p:cNvSpPr>
-          <p:nvPr>
-            <p:ph type="sldNum" idx="5" sz="quarter"/>
-          </p:nvPr>
-        </p:nvSpPr>
-        <p:spPr/>
-      </p:sp>
-    </p:spTree>
-  </p:cSld>
-  <p:clrMapOvr>
-    <a:masterClrMapping/>
-  </p:clrMapOvr>
-</p:notes>
-</file>
-
-<file path=ppt/notesSlides/notesSlide4.xml><?xml version="1.0" encoding="utf-8"?>
-<p:notes xmlns:a="http://schemas.openxmlformats.org/drawingml/2006/main" xmlns:p="http://schemas.openxmlformats.org/presentationml/2006/main" xmlns:r="http://schemas.openxmlformats.org/officeDocument/2006/relationships">
-  <p:cSld>
-    <p:spTree>
-      <p:nvGrpSpPr>
-        <p:cNvPr id="1" name=""/>
-        <p:cNvGrpSpPr/>
-        <p:nvPr/>
-      </p:nvGrpSpPr>
-      <p:grpSpPr>
-        <a:xfrm>
-          <a:off x="0" y="0"/>
-          <a:ext cx="0" cy="0"/>
-          <a:chOff x="0" y="0"/>
-          <a:chExt cx="0" cy="0"/>
-        </a:xfrm>
-      </p:grpSpPr>
-      <p:sp>
-        <p:nvSpPr>
-          <p:cNvPr id="2" name="Slide Image Placeholder 1"/>
-          <p:cNvSpPr>
-            <a:spLocks noGrp="1"/>
-          </p:cNvSpPr>
-          <p:nvPr>
-            <p:ph type="sldImg" idx="2"/>
-          </p:nvPr>
-        </p:nvSpPr>
-        <p:spPr/>
-      </p:sp>
-      <p:sp>
-        <p:nvSpPr>
-          <p:cNvPr id="3" name="Notes Placeholder 2"/>
-          <p:cNvSpPr>
-            <a:spLocks noGrp="1"/>
-          </p:cNvSpPr>
-          <p:nvPr>
-            <p:ph type="body" idx="3" sz="quarter"/>
-          </p:nvPr>
-        </p:nvSpPr>
-        <p:spPr/>
-        <p:txBody>
-          <a:bodyPr/>
-          <a:lstStyle/>
-          <a:p>
-            <a:r>
-              <a:t>Dejar unos segundos para que piensen la respuesta fácil antes de enseñar los pasos.</a:t>
-            </a:r>
-          </a:p>
-        </p:txBody>
-      </p:sp>
-      <p:sp>
-        <p:nvSpPr>
-          <p:cNvPr id="4" name="Slide Number Placeholder 3"/>
-          <p:cNvSpPr>
-            <a:spLocks noGrp="1"/>
-          </p:cNvSpPr>
-          <p:nvPr>
-            <p:ph type="sldNum" idx="5" sz="quarter"/>
-          </p:nvPr>
-        </p:nvSpPr>
-        <p:spPr/>
-      </p:sp>
-    </p:spTree>
-  </p:cSld>
-  <p:clrMapOvr>
-    <a:masterClrMapping/>
-  </p:clrMapOvr>
-</p:notes>
-</file>
-
-<file path=ppt/notesSlides/notesSlide5.xml><?xml version="1.0" encoding="utf-8"?>
-<p:notes xmlns:a="http://schemas.openxmlformats.org/drawingml/2006/main" xmlns:p="http://schemas.openxmlformats.org/presentationml/2006/main" xmlns:r="http://schemas.openxmlformats.org/officeDocument/2006/relationships">
-  <p:cSld>
-    <p:spTree>
-      <p:nvGrpSpPr>
-        <p:cNvPr id="1" name=""/>
-        <p:cNvGrpSpPr/>
-        <p:nvPr/>
-      </p:nvGrpSpPr>
-      <p:grpSpPr>
-        <a:xfrm>
-          <a:off x="0" y="0"/>
-          <a:ext cx="0" cy="0"/>
-          <a:chOff x="0" y="0"/>
-          <a:chExt cx="0" cy="0"/>
-        </a:xfrm>
-      </p:grpSpPr>
-      <p:sp>
-        <p:nvSpPr>
-          <p:cNvPr id="2" name="Slide Image Placeholder 1"/>
-          <p:cNvSpPr>
-            <a:spLocks noGrp="1"/>
-          </p:cNvSpPr>
-          <p:nvPr>
-            <p:ph type="sldImg" idx="2"/>
-          </p:nvPr>
-        </p:nvSpPr>
-        <p:spPr/>
-      </p:sp>
-      <p:sp>
-        <p:nvSpPr>
-          <p:cNvPr id="3" name="Notes Placeholder 2"/>
-          <p:cNvSpPr>
-            <a:spLocks noGrp="1"/>
-          </p:cNvSpPr>
-          <p:nvPr>
-            <p:ph type="body" idx="3" sz="quarter"/>
-          </p:nvPr>
-        </p:nvSpPr>
-        <p:spPr/>
-        <p:txBody>
-          <a:bodyPr/>
-          <a:lstStyle/>
-          <a:p>
-            <a:r>
-              <a:t>Dejar 2 minutos para que lo escriban. La diapositiva siguiente muestra el resumen.</a:t>
-            </a:r>
-          </a:p>
-        </p:txBody>
-      </p:sp>
-      <p:sp>
-        <p:nvSpPr>
-          <p:cNvPr id="4" name="Slide Number Placeholder 3"/>
-          <p:cNvSpPr>
-            <a:spLocks noGrp="1"/>
-          </p:cNvSpPr>
-          <p:nvPr>
-            <p:ph type="sldNum" idx="5" sz="quarter"/>
-          </p:nvPr>
-        </p:nvSpPr>
-        <p:spPr/>
-      </p:sp>
-    </p:spTree>
-  </p:cSld>
-  <p:clrMapOvr>
-    <a:masterClrMapping/>
-  </p:clrMapOvr>
-</p:notes>
-</file>
-
-<file path=ppt/notesSlides/notesSlide6.xml><?xml version="1.0" encoding="utf-8"?>
-<p:notes xmlns:a="http://schemas.openxmlformats.org/drawingml/2006/main" xmlns:p="http://schemas.openxmlformats.org/presentationml/2006/main" xmlns:r="http://schemas.openxmlformats.org/officeDocument/2006/relationships">
-  <p:cSld>
-    <p:spTree>
-      <p:nvGrpSpPr>
-        <p:cNvPr id="1" name=""/>
-        <p:cNvGrpSpPr/>
-        <p:nvPr/>
-      </p:nvGrpSpPr>
-      <p:grpSpPr>
-        <a:xfrm>
-          <a:off x="0" y="0"/>
-          <a:ext cx="0" cy="0"/>
-          <a:chOff x="0" y="0"/>
-          <a:chExt cx="0" cy="0"/>
-        </a:xfrm>
-      </p:grpSpPr>
-      <p:sp>
-        <p:nvSpPr>
-          <p:cNvPr id="2" name="Slide Image Placeholder 1"/>
-          <p:cNvSpPr>
-            <a:spLocks noGrp="1"/>
-          </p:cNvSpPr>
-          <p:nvPr>
-            <p:ph type="sldImg" idx="2"/>
-          </p:nvPr>
-        </p:nvSpPr>
-        <p:spPr/>
-      </p:sp>
-      <p:sp>
-        <p:nvSpPr>
-          <p:cNvPr id="3" name="Notes Placeholder 2"/>
-          <p:cNvSpPr>
-            <a:spLocks noGrp="1"/>
-          </p:cNvSpPr>
-          <p:nvPr>
-            <p:ph type="body" idx="3" sz="quarter"/>
-          </p:nvPr>
-        </p:nvSpPr>
-        <p:spPr/>
-        <p:txBody>
-          <a:bodyPr/>
-          <a:lstStyle/>
-          <a:p>
-            <a:r>
-              <a:t>Buscar: «premisa implícita ejemplos» · «entimema explicación sencilla»</a:t>
-            </a:r>
-          </a:p>
-        </p:txBody>
-      </p:sp>
-      <p:sp>
-        <p:nvSpPr>
-          <p:cNvPr id="4" name="Slide Number Placeholder 3"/>
-          <p:cNvSpPr>
-            <a:spLocks noGrp="1"/>
-          </p:cNvSpPr>
-          <p:nvPr>
-            <p:ph type="sldNum" idx="5" sz="quarter"/>
-          </p:nvPr>
-        </p:nvSpPr>
-        <p:spPr/>
-      </p:sp>
-    </p:spTree>
-  </p:cSld>
-  <p:clrMapOvr>
-    <a:masterClrMapping/>
-  </p:clrMapOvr>
-</p:notes>
 </file>
 
 <file path=ppt/slideLayouts/slideLayout1.xml><?xml version="1.0" encoding="utf-8"?>

--- a/curso/pptx/S08.pptx
+++ b/curso/pptx/S08.pptx
@@ -4146,7 +4146,7 @@
                 </a:solidFill>
                 <a:latin typeface="Nunito Sans"/>
               </a:rPr>
-              <a:t>«Iker no puede ser el portero: lleva gafas.»</a:t>
+              <a:t>«Un chico no puede ser el portero: lleva gafas.»</a:t>
             </a:r>
           </a:p>
         </p:txBody>
@@ -4194,7 +4194,7 @@
                 </a:solidFill>
                 <a:latin typeface="Nunito Sans"/>
               </a:rPr>
-              <a:t>C: Iker no puede ser el portero. P1: Iker lleva gafas.</a:t>
+              <a:t>C: el chico no puede ser el portero. P1: el chico lleva gafas.</a:t>
             </a:r>
           </a:p>
           <a:p>
@@ -5350,7 +5350,7 @@
                 </a:solidFill>
                 <a:latin typeface="Nunito Sans"/>
               </a:rPr>
-              <a:t>«Kevin no puede llevar la moto de su tío: tiene 13 años.»</a:t>
+              <a:t>«Un chico no puede llevar la moto de su tío: tiene 13 años.»</a:t>
             </a:r>
           </a:p>
         </p:txBody>
@@ -7076,7 +7076,7 @@
                 </a:solidFill>
                 <a:latin typeface="Nunito Sans"/>
               </a:rPr>
-              <a:t>«Iker no puede ser el portero: lleva gafas.»</a:t>
+              <a:t>«Un chico no puede ser el portero: lleva gafas.»</a:t>
             </a:r>
           </a:p>
         </p:txBody>

--- a/curso/pptx/S08.pptx
+++ b/curso/pptx/S08.pptx
@@ -22,8 +22,6 @@
     <p:sldId id="270" r:id="rId22"/>
     <p:sldId id="271" r:id="rId23"/>
     <p:sldId id="272" r:id="rId24"/>
-    <p:sldId id="273" r:id="rId25"/>
-    <p:sldId id="274" r:id="rId26"/>
   </p:sldIdLst>
   <p:sldSz cx="12192000" cy="6858000" type="screen4x3"/>
   <p:notesSz cx="6858000" cy="9144000"/>
@@ -3537,7 +3535,7 @@
                 </a:solidFill>
                 <a:latin typeface="Nunito Sans"/>
               </a:rPr>
-              <a:t>PENSAMIENTO CRÍTICO · SESIÓN 8 · UNIDAD 2 · ARGUMENTAR</a:t>
+              <a:t>PENSAMIENTO CRÍTICO · SESIÓN 8 · UNIDAD 2 · AUTORIDAD E INFLUENCIA</a:t>
             </a:r>
           </a:p>
         </p:txBody>
@@ -3576,7 +3574,7 @@
                 </a:solidFill>
                 <a:latin typeface="Fredoka"/>
               </a:rPr>
-              <a:t>Reconstruir argumentos</a:t>
+              <a:t>La falacia de autoridad</a:t>
             </a:r>
           </a:p>
         </p:txBody>
@@ -3615,7 +3613,7 @@
                 </a:solidFill>
                 <a:latin typeface="Nunito Sans"/>
               </a:rPr>
-              <a:t>Reconstruir un argumento es escribirlo ordenado, quitar lo que sobra y descubrir las premisas ocultas que no se dicen.</a:t>
+              <a:t>La falacia de autoridad es creer algo solo porque lo dice alguien famoso o que parece experto, sin mirar si sabe del tema.</a:t>
             </a:r>
           </a:p>
         </p:txBody>
@@ -3719,7 +3717,7 @@
                 </a:solidFill>
                 <a:latin typeface="Fredoka"/>
               </a:rPr>
-              <a:t>Caso 1 · Quitar lo que sobra</a:t>
+              <a:t>Caso 1 · El gamer y las vitaminas</a:t>
             </a:r>
           </a:p>
         </p:txBody>
@@ -3801,7 +3799,7 @@
                 </a:solidFill>
                 <a:latin typeface="Nunito Sans"/>
               </a:rPr>
-              <a:t>«Tío, en serio, trae mañana la autorización firmada, que sin ella no te dejan subir al autobús de la excursión, ya lo sabes.»</a:t>
+              <a:t>Un chico sigue a un gamer con dos millones de seguidores. El gamer dice que unas gominolas de vitaminas «te hacen más listo».</a:t>
             </a:r>
           </a:p>
         </p:txBody>
@@ -3849,16 +3847,48 @@
                 </a:solidFill>
                 <a:latin typeface="Nunito Sans"/>
               </a:rPr>
-              <a:t>¿Qué quiere que acepte? Que traiga mañana la autorización: es la </a:t>
-            </a:r>
+              <a:t>¿Quién lo dice? Un gamer: sabe de videojuegos, no de alimentación.</a:t>
+            </a:r>
+          </a:p>
+          <a:p>
+            <a:pPr>
+              <a:spcAft>
+                <a:spcPts val="1080"/>
+              </a:spcAft>
+            </a:pPr>
             <a:r>
               <a:rPr sz="2400" b="1">
                 <a:solidFill>
+                  <a:srgbClr val="E8793A"/>
+                </a:solidFill>
+                <a:latin typeface="Nunito Sans"/>
+              </a:rPr>
+              <a:t>2. </a:t>
+            </a:r>
+            <a:r>
+              <a:rPr sz="2400" b="0">
+                <a:solidFill>
                   <a:srgbClr val="1F2A44"/>
                 </a:solidFill>
                 <a:latin typeface="Nunito Sans"/>
               </a:rPr>
-              <a:t>C</a:t>
+              <a:t>¿Tiene intereses? Puede que cobre por anunciarlas: hay que mirarlo.</a:t>
+            </a:r>
+          </a:p>
+          <a:p>
+            <a:pPr>
+              <a:spcAft>
+                <a:spcPts val="1080"/>
+              </a:spcAft>
+            </a:pPr>
+            <a:r>
+              <a:rPr sz="2400" b="1">
+                <a:solidFill>
+                  <a:srgbClr val="E8793A"/>
+                </a:solidFill>
+                <a:latin typeface="Nunito Sans"/>
+              </a:rPr>
+              <a:t>3. </a:t>
             </a:r>
             <a:r>
               <a:rPr sz="2400" b="0">
@@ -3867,7 +3897,7 @@
                 </a:solidFill>
                 <a:latin typeface="Nunito Sans"/>
               </a:rPr>
-              <a:t>.</a:t>
+              <a:t>¿Da pruebas? No: solo su palabra. Y sus seguidores no son pruebas.</a:t>
             </a:r>
           </a:p>
           <a:p>
@@ -3883,7 +3913,7 @@
                 </a:solidFill>
                 <a:latin typeface="Nunito Sans"/>
               </a:rPr>
-              <a:t>2. </a:t>
+              <a:t>4. </a:t>
             </a:r>
             <a:r>
               <a:rPr sz="2400" b="0">
@@ -3892,75 +3922,7 @@
                 </a:solidFill>
                 <a:latin typeface="Nunito Sans"/>
               </a:rPr>
-              <a:t>¿Qué da para apoyarlo? Sin autorización no dejan subir al autobús: es la </a:t>
-            </a:r>
-            <a:r>
-              <a:rPr sz="2400" b="1">
-                <a:solidFill>
-                  <a:srgbClr val="1F2A44"/>
-                </a:solidFill>
-                <a:latin typeface="Nunito Sans"/>
-              </a:rPr>
-              <a:t>P1</a:t>
-            </a:r>
-            <a:r>
-              <a:rPr sz="2400" b="0">
-                <a:solidFill>
-                  <a:srgbClr val="1F2A44"/>
-                </a:solidFill>
-                <a:latin typeface="Nunito Sans"/>
-              </a:rPr>
-              <a:t>.</a:t>
-            </a:r>
-          </a:p>
-          <a:p>
-            <a:pPr>
-              <a:spcAft>
-                <a:spcPts val="1080"/>
-              </a:spcAft>
-            </a:pPr>
-            <a:r>
-              <a:rPr sz="2400" b="1">
-                <a:solidFill>
-                  <a:srgbClr val="E8793A"/>
-                </a:solidFill>
-                <a:latin typeface="Nunito Sans"/>
-              </a:rPr>
-              <a:t>3. </a:t>
-            </a:r>
-            <a:r>
-              <a:rPr sz="2400" b="0">
-                <a:solidFill>
-                  <a:srgbClr val="1F2A44"/>
-                </a:solidFill>
-                <a:latin typeface="Nunito Sans"/>
-              </a:rPr>
-              <a:t>Sobran «tío», «en serio» y «ya lo sabes»: son adornos, no razones.</a:t>
-            </a:r>
-          </a:p>
-          <a:p>
-            <a:pPr>
-              <a:spcAft>
-                <a:spcPts val="1080"/>
-              </a:spcAft>
-            </a:pPr>
-            <a:r>
-              <a:rPr sz="2400" b="1">
-                <a:solidFill>
-                  <a:srgbClr val="E8793A"/>
-                </a:solidFill>
-                <a:latin typeface="Nunito Sans"/>
-              </a:rPr>
-              <a:t>4. </a:t>
-            </a:r>
-            <a:r>
-              <a:rPr sz="2400" b="0">
-                <a:solidFill>
-                  <a:srgbClr val="1F2A44"/>
-                </a:solidFill>
-                <a:latin typeface="Nunito Sans"/>
-              </a:rPr>
-              <a:t>Conclusión: P1: sin autorización no subes al autobús. C: trae mañana la autorización.</a:t>
+              <a:t>Conclusión: falacia de autoridad, con el truco del famoso.</a:t>
             </a:r>
           </a:p>
         </p:txBody>
@@ -4064,7 +4026,7 @@
                 </a:solidFill>
                 <a:latin typeface="Fredoka"/>
               </a:rPr>
-              <a:t>Caso 2 · El portero con gafas</a:t>
+              <a:t>Caso 2 · La bata blanca</a:t>
             </a:r>
           </a:p>
         </p:txBody>
@@ -4146,7 +4108,7 @@
                 </a:solidFill>
                 <a:latin typeface="Nunito Sans"/>
               </a:rPr>
-              <a:t>«Un chico no puede ser el portero: lleva gafas.»</a:t>
+              <a:t>Anuncio de champú: una mujer con bata blanca, en un laboratorio, dice que el champú «repara el pelo desde dentro».</a:t>
             </a:r>
           </a:p>
         </p:txBody>
@@ -4194,7 +4156,7 @@
                 </a:solidFill>
                 <a:latin typeface="Nunito Sans"/>
               </a:rPr>
-              <a:t>C: el chico no puede ser el portero. P1: el chico lleva gafas.</a:t>
+              <a:t>¿Quién es? No lo dicen: puede ser una actriz.</a:t>
             </a:r>
           </a:p>
           <a:p>
@@ -4219,7 +4181,7 @@
                 </a:solidFill>
                 <a:latin typeface="Nunito Sans"/>
               </a:rPr>
-              <a:t>¿Qué falta para llegar a la C? Algo así: «quien lleva gafas no puede ser portero».</a:t>
+              <a:t>La bata y el laboratorio son decorado: dan aspecto de ciencia.</a:t>
             </a:r>
           </a:p>
           <a:p>
@@ -4244,50 +4206,32 @@
                 </a:solidFill>
                 <a:latin typeface="Nunito Sans"/>
               </a:rPr>
-              <a:t>Esa es la </a:t>
-            </a:r>
+              <a:t>¿Hay pruebas? No: «desde dentro» no explica nada.</a:t>
+            </a:r>
+          </a:p>
+          <a:p>
+            <a:pPr>
+              <a:spcAft>
+                <a:spcPts val="1080"/>
+              </a:spcAft>
+            </a:pPr>
             <a:r>
               <a:rPr sz="2400" b="1">
                 <a:solidFill>
+                  <a:srgbClr val="E8793A"/>
+                </a:solidFill>
+                <a:latin typeface="Nunito Sans"/>
+              </a:rPr>
+              <a:t>4. </a:t>
+            </a:r>
+            <a:r>
+              <a:rPr sz="2400" b="0">
+                <a:solidFill>
                   <a:srgbClr val="1F2A44"/>
                 </a:solidFill>
                 <a:latin typeface="Nunito Sans"/>
               </a:rPr>
-              <a:t>premisa oculta</a:t>
-            </a:r>
-            <a:r>
-              <a:rPr sz="2400" b="0">
-                <a:solidFill>
-                  <a:srgbClr val="1F2A44"/>
-                </a:solidFill>
-                <a:latin typeface="Nunito Sans"/>
-              </a:rPr>
-              <a:t>. Escrita, se ve que es falsa: se puede jugar con gafas deportivas o lentillas.</a:t>
-            </a:r>
-          </a:p>
-          <a:p>
-            <a:pPr>
-              <a:spcAft>
-                <a:spcPts val="1080"/>
-              </a:spcAft>
-            </a:pPr>
-            <a:r>
-              <a:rPr sz="2400" b="1">
-                <a:solidFill>
-                  <a:srgbClr val="E8793A"/>
-                </a:solidFill>
-                <a:latin typeface="Nunito Sans"/>
-              </a:rPr>
-              <a:t>4. </a:t>
-            </a:r>
-            <a:r>
-              <a:rPr sz="2400" b="0">
-                <a:solidFill>
-                  <a:srgbClr val="1F2A44"/>
-                </a:solidFill>
-                <a:latin typeface="Nunito Sans"/>
-              </a:rPr>
-              <a:t>Conclusión: el argumento falla por la premisa que no se decía.</a:t>
+              <a:t>Conclusión: falacia de autoridad, con el truco de la bata blanca. La ropa no es una razón.</a:t>
             </a:r>
           </a:p>
         </p:txBody>
@@ -4391,7 +4335,7 @@
                 </a:solidFill>
                 <a:latin typeface="Fredoka"/>
               </a:rPr>
-              <a:t>Caso 3 · Una premisa oculta que sí es verdad</a:t>
+              <a:t>Caso 3 · «Los expertos dicen»</a:t>
             </a:r>
           </a:p>
         </p:txBody>
@@ -4473,7 +4417,7 @@
                 </a:solidFill>
                 <a:latin typeface="Nunito Sans"/>
               </a:rPr>
-              <a:t>«Hoy no hay entrenamiento: el campo está inundado.»</a:t>
+              <a:t>Un vídeo de TikTok: «Los expertos dicen que dormir con el móvil al lado da dolor de cabeza».</a:t>
             </a:r>
           </a:p>
         </p:txBody>
@@ -4521,7 +4465,7 @@
                 </a:solidFill>
                 <a:latin typeface="Nunito Sans"/>
               </a:rPr>
-              <a:t>C: hoy no hay entrenamiento. P1: el campo está inundado.</a:t>
+              <a:t>¿Qué expertos? No dice nombres ni dónde trabajan.</a:t>
             </a:r>
           </a:p>
           <a:p>
@@ -4546,7 +4490,7 @@
                 </a:solidFill>
                 <a:latin typeface="Nunito Sans"/>
               </a:rPr>
-              <a:t>Premisa oculta: «en un campo inundado no se puede entrenar».</a:t>
+              <a:t>¿Qué pruebas? Ninguna.</a:t>
             </a:r>
           </a:p>
           <a:p>
@@ -4571,7 +4515,7 @@
                 </a:solidFill>
                 <a:latin typeface="Nunito Sans"/>
               </a:rPr>
-              <a:t>¿Es verdad? Sí, es razonable. Aquí la premisa oculta no da problemas.</a:t>
+              <a:t>¿Es falso seguro? No: puede ser verdad o no. Pero así no lo puedo saber.</a:t>
             </a:r>
           </a:p>
           <a:p>
@@ -4596,7 +4540,7 @@
                 </a:solidFill>
                 <a:latin typeface="Nunito Sans"/>
               </a:rPr>
-              <a:t>Conclusión: buscar la premisa oculta no sirve para atacar. Sirve para ver si el argumento se sostiene.</a:t>
+              <a:t>Conclusión: creerlo solo por «los expertos dicen» es fiarse a ciegas. Busco quiénes son y cómo lo saben.</a:t>
             </a:r>
           </a:p>
         </p:txBody>
@@ -4615,7 +4559,7 @@
     <p:bg>
       <p:bgPr>
         <a:solidFill>
-          <a:srgbClr val="1F2A44"/>
+          <a:srgbClr val="F6C9A8"/>
         </a:solidFill>
         <a:effectLst/>
       </p:bgPr>
@@ -4635,8 +4579,8 @@
         </p:nvSpPr>
         <p:spPr>
           <a:xfrm>
-            <a:off x="640000" y="2300000"/>
-            <a:ext cx="10912000" cy="500000"/>
+            <a:off x="640000" y="380000"/>
+            <a:ext cx="10912000" cy="420000"/>
           </a:xfrm>
           <a:prstGeom prst="rect">
             <a:avLst/>
@@ -4651,17 +4595,17 @@
           <a:p>
             <a:pPr>
               <a:spcAft>
-                <a:spcPts val="810"/>
-              </a:spcAft>
-            </a:pPr>
-            <a:r>
-              <a:rPr sz="1800" b="1">
-                <a:solidFill>
-                  <a:srgbClr val="F4B183"/>
-                </a:solidFill>
-                <a:latin typeface="Nunito Sans"/>
-              </a:rPr>
-              <a:t>BLOQUE 3</a:t>
+                <a:spcPts val="630"/>
+              </a:spcAft>
+            </a:pPr>
+            <a:r>
+              <a:rPr sz="1400" b="1">
+                <a:solidFill>
+                  <a:srgbClr val="1F2A44"/>
+                </a:solidFill>
+                <a:latin typeface="Nunito Sans"/>
+              </a:rPr>
+              <a:t>CASO TRAMPA · BLOQUE 2 · CASOS RESUELTOS</a:t>
             </a:r>
           </a:p>
         </p:txBody>
@@ -4674,7 +4618,7 @@
         </p:nvSpPr>
         <p:spPr>
           <a:xfrm>
-            <a:off x="640000" y="2800000"/>
+            <a:off x="640000" y="760000"/>
             <a:ext cx="10912000" cy="800000"/>
           </a:xfrm>
           <a:prstGeom prst="rect">
@@ -4690,17 +4634,247 @@
           <a:p>
             <a:pPr>
               <a:spcAft>
-                <a:spcPts val="2160"/>
-              </a:spcAft>
-            </a:pPr>
-            <a:r>
-              <a:rPr sz="4800" b="1">
-                <a:solidFill>
-                  <a:srgbClr val="FBF7EF"/>
+                <a:spcPts val="1710"/>
+              </a:spcAft>
+            </a:pPr>
+            <a:r>
+              <a:rPr sz="3800" b="1">
+                <a:solidFill>
+                  <a:srgbClr val="1F2A44"/>
                 </a:solidFill>
                 <a:latin typeface="Fredoka"/>
               </a:rPr>
-              <a:t>Reconstruir con justicia</a:t>
+              <a:t>⚠ Una bata de verdad</a:t>
+            </a:r>
+          </a:p>
+        </p:txBody>
+      </p:sp>
+      <p:sp>
+        <p:nvSpPr>
+          <p:cNvPr id="4" name="Rectangle 3"/>
+          <p:cNvSpPr/>
+          <p:nvPr/>
+        </p:nvSpPr>
+        <p:spPr>
+          <a:xfrm>
+            <a:off x="640000" y="1600000"/>
+            <a:ext cx="10912000" cy="1100000"/>
+          </a:xfrm>
+          <a:prstGeom prst="rect">
+            <a:avLst/>
+          </a:prstGeom>
+          <a:solidFill>
+            <a:srgbClr val="FBF7EF"/>
+          </a:solidFill>
+          <a:ln>
+            <a:noFill/>
+          </a:ln>
+        </p:spPr>
+        <p:style>
+          <a:lnRef idx="1">
+            <a:schemeClr val="accent1"/>
+          </a:lnRef>
+          <a:fillRef idx="3">
+            <a:schemeClr val="accent1"/>
+          </a:fillRef>
+          <a:effectRef idx="2">
+            <a:schemeClr val="accent1"/>
+          </a:effectRef>
+          <a:fontRef idx="minor">
+            <a:schemeClr val="lt1"/>
+          </a:fontRef>
+        </p:style>
+        <p:txBody>
+          <a:bodyPr rtlCol="0" anchor="ctr"/>
+          <a:lstStyle/>
+          <a:p>
+            <a:pPr algn="ctr"/>
+          </a:p>
+        </p:txBody>
+      </p:sp>
+      <p:sp>
+        <p:nvSpPr>
+          <p:cNvPr id="5" name="TextBox 4"/>
+          <p:cNvSpPr txBox="1"/>
+          <p:nvPr/>
+        </p:nvSpPr>
+        <p:spPr>
+          <a:xfrm>
+            <a:off x="840000" y="1650000"/>
+            <a:ext cx="10512000" cy="1000000"/>
+          </a:xfrm>
+          <a:prstGeom prst="rect">
+            <a:avLst/>
+          </a:prstGeom>
+          <a:noFill/>
+        </p:spPr>
+        <p:txBody>
+          <a:bodyPr wrap="square" anchor="ctr">
+            <a:spAutoFit/>
+          </a:bodyPr>
+          <a:lstStyle/>
+          <a:p>
+            <a:pPr>
+              <a:spcAft>
+                <a:spcPts val="1170"/>
+              </a:spcAft>
+            </a:pPr>
+            <a:r>
+              <a:rPr sz="2600" b="1">
+                <a:solidFill>
+                  <a:srgbClr val="1F2A44"/>
+                </a:solidFill>
+                <a:latin typeface="Nunito Sans"/>
+              </a:rPr>
+              <a:t>Un vídeo del servicio de salud: una médica con bata blanca explica cómo lavarse bien las manos. Un chico: «El truco de la bata blanca. Falacia».</a:t>
+            </a:r>
+          </a:p>
+        </p:txBody>
+      </p:sp>
+      <p:sp>
+        <p:nvSpPr>
+          <p:cNvPr id="6" name="TextBox 5"/>
+          <p:cNvSpPr txBox="1"/>
+          <p:nvPr/>
+        </p:nvSpPr>
+        <p:spPr>
+          <a:xfrm>
+            <a:off x="640000" y="2900000"/>
+            <a:ext cx="10912000" cy="3500000"/>
+          </a:xfrm>
+          <a:prstGeom prst="rect">
+            <a:avLst/>
+          </a:prstGeom>
+          <a:noFill/>
+        </p:spPr>
+        <p:txBody>
+          <a:bodyPr wrap="square">
+            <a:spAutoFit/>
+          </a:bodyPr>
+          <a:lstStyle/>
+          <a:p>
+            <a:pPr>
+              <a:spcAft>
+                <a:spcPts val="1080"/>
+              </a:spcAft>
+            </a:pPr>
+            <a:r>
+              <a:rPr sz="2400" b="1">
+                <a:solidFill>
+                  <a:srgbClr val="E8793A"/>
+                </a:solidFill>
+                <a:latin typeface="Nunito Sans"/>
+              </a:rPr>
+              <a:t>1. </a:t>
+            </a:r>
+            <a:r>
+              <a:rPr sz="2400" b="0">
+                <a:solidFill>
+                  <a:srgbClr val="1F2A44"/>
+                </a:solidFill>
+                <a:latin typeface="Nunito Sans"/>
+              </a:rPr>
+              <a:t>Hay bata blanca… ¿es falacia de autoridad?</a:t>
+            </a:r>
+          </a:p>
+          <a:p>
+            <a:pPr>
+              <a:spcAft>
+                <a:spcPts val="1080"/>
+              </a:spcAft>
+            </a:pPr>
+            <a:r>
+              <a:rPr sz="2400" b="1">
+                <a:solidFill>
+                  <a:srgbClr val="E8793A"/>
+                </a:solidFill>
+                <a:latin typeface="Nunito Sans"/>
+              </a:rPr>
+              <a:t>2. </a:t>
+            </a:r>
+            <a:r>
+              <a:rPr sz="2400" b="0">
+                <a:solidFill>
+                  <a:srgbClr val="1F2A44"/>
+                </a:solidFill>
+                <a:latin typeface="Nunito Sans"/>
+              </a:rPr>
+              <a:t>La bata blanca es uno de los trucos, sí.</a:t>
+            </a:r>
+          </a:p>
+          <a:p>
+            <a:pPr>
+              <a:spcAft>
+                <a:spcPts val="1080"/>
+              </a:spcAft>
+            </a:pPr>
+            <a:r>
+              <a:rPr sz="2400" b="1">
+                <a:solidFill>
+                  <a:srgbClr val="E8793A"/>
+                </a:solidFill>
+                <a:latin typeface="Nunito Sans"/>
+              </a:rPr>
+              <a:t>3. </a:t>
+            </a:r>
+            <a:r>
+              <a:rPr sz="2400" b="0">
+                <a:solidFill>
+                  <a:srgbClr val="1F2A44"/>
+                </a:solidFill>
+                <a:latin typeface="Nunito Sans"/>
+              </a:rPr>
+              <a:t>Pero aquí no es decorado: es médica de verdad y habla de su campo.</a:t>
+            </a:r>
+          </a:p>
+          <a:p>
+            <a:pPr>
+              <a:spcAft>
+                <a:spcPts val="1080"/>
+              </a:spcAft>
+            </a:pPr>
+            <a:r>
+              <a:rPr sz="2400" b="1">
+                <a:solidFill>
+                  <a:srgbClr val="E8793A"/>
+                </a:solidFill>
+                <a:latin typeface="Nunito Sans"/>
+              </a:rPr>
+              <a:t>4. </a:t>
+            </a:r>
+            <a:r>
+              <a:rPr sz="2400" b="0">
+                <a:solidFill>
+                  <a:srgbClr val="1F2A44"/>
+                </a:solidFill>
+                <a:latin typeface="Nunito Sans"/>
+              </a:rPr>
+              <a:t>Dice lo mismo que casi todos los médicos, y no vende nada.</a:t>
+            </a:r>
+          </a:p>
+          <a:p>
+            <a:pPr>
+              <a:spcAft>
+                <a:spcPts val="1080"/>
+              </a:spcAft>
+            </a:pPr>
+            <a:r>
+              <a:rPr sz="2400" b="1">
+                <a:solidFill>
+                  <a:srgbClr val="E8793A"/>
+                </a:solidFill>
+                <a:latin typeface="Nunito Sans"/>
+              </a:rPr>
+              <a:t>5. </a:t>
+            </a:r>
+            <a:r>
+              <a:rPr sz="2400" b="0">
+                <a:solidFill>
+                  <a:srgbClr val="1F2A44"/>
+                </a:solidFill>
+                <a:latin typeface="Nunito Sans"/>
+              </a:rPr>
+              <a:t>Conclusión: no es falacia. La bata no es una razón, pero tampoco la quita: mira quién es y qué sabe.</a:t>
             </a:r>
           </a:p>
         </p:txBody>
@@ -4765,7 +4939,7 @@
                 </a:solidFill>
                 <a:latin typeface="Nunito Sans"/>
               </a:rPr>
-              <a:t>BLOQUE 3 · RECONSTRUIR CON JUSTICIA</a:t>
+              <a:t>LO DE HOY EN TRES LÍNEAS</a:t>
             </a:r>
           </a:p>
         </p:txBody>
@@ -4804,64 +4978,21 @@
                 </a:solidFill>
                 <a:latin typeface="Fredoka"/>
               </a:rPr>
-              <a:t>Al reconstruir el argumento de otro</a:t>
-            </a:r>
-          </a:p>
-        </p:txBody>
-      </p:sp>
-      <p:sp>
-        <p:nvSpPr>
-          <p:cNvPr id="4" name="Rectangle 3"/>
-          <p:cNvSpPr/>
-          <p:nvPr/>
-        </p:nvSpPr>
-        <p:spPr>
-          <a:xfrm>
-            <a:off x="640000" y="1650000"/>
-            <a:ext cx="5306000" cy="4400000"/>
-          </a:xfrm>
-          <a:prstGeom prst="rect">
-            <a:avLst/>
-          </a:prstGeom>
-          <a:solidFill>
-            <a:srgbClr val="FBE3D2"/>
-          </a:solidFill>
-          <a:ln>
-            <a:noFill/>
-          </a:ln>
-        </p:spPr>
-        <p:style>
-          <a:lnRef idx="1">
-            <a:schemeClr val="accent1"/>
-          </a:lnRef>
-          <a:fillRef idx="3">
-            <a:schemeClr val="accent1"/>
-          </a:fillRef>
-          <a:effectRef idx="2">
-            <a:schemeClr val="accent1"/>
-          </a:effectRef>
-          <a:fontRef idx="minor">
-            <a:schemeClr val="lt1"/>
-          </a:fontRef>
-        </p:style>
-        <p:txBody>
-          <a:bodyPr rtlCol="0" anchor="ctr"/>
-          <a:lstStyle/>
-          <a:p>
-            <a:pPr algn="ctr"/>
-          </a:p>
-        </p:txBody>
-      </p:sp>
-      <p:sp>
-        <p:nvSpPr>
-          <p:cNvPr id="5" name="TextBox 4"/>
+              <a:t>Escríbelo tú primero, sin mirar</a:t>
+            </a:r>
+          </a:p>
+        </p:txBody>
+      </p:sp>
+      <p:sp>
+        <p:nvSpPr>
+          <p:cNvPr id="4" name="TextBox 3"/>
           <p:cNvSpPr txBox="1"/>
           <p:nvPr/>
         </p:nvSpPr>
         <p:spPr>
           <a:xfrm>
-            <a:off x="840000" y="1750000"/>
-            <a:ext cx="4906000" cy="600000"/>
+            <a:off x="640000" y="1800000"/>
+            <a:ext cx="10912000" cy="1500000"/>
           </a:xfrm>
           <a:prstGeom prst="rect">
             <a:avLst/>
@@ -4876,295 +5007,17 @@
           <a:p>
             <a:pPr>
               <a:spcAft>
-                <a:spcPts val="1260"/>
-              </a:spcAft>
-            </a:pPr>
-            <a:r>
-              <a:rPr sz="2800" b="1">
-                <a:solidFill>
-                  <a:srgbClr val="C2531C"/>
-                </a:solidFill>
-                <a:latin typeface="Nunito Sans"/>
-              </a:rPr>
-              <a:t>Error</a:t>
-            </a:r>
-          </a:p>
-        </p:txBody>
-      </p:sp>
-      <p:sp>
-        <p:nvSpPr>
-          <p:cNvPr id="6" name="TextBox 5"/>
-          <p:cNvSpPr txBox="1"/>
-          <p:nvPr/>
-        </p:nvSpPr>
-        <p:spPr>
-          <a:xfrm>
-            <a:off x="840000" y="2400000"/>
-            <a:ext cx="4906000" cy="3500000"/>
-          </a:xfrm>
-          <a:prstGeom prst="rect">
-            <a:avLst/>
-          </a:prstGeom>
-          <a:noFill/>
-        </p:spPr>
-        <p:txBody>
-          <a:bodyPr wrap="square">
-            <a:spAutoFit/>
-          </a:bodyPr>
-          <a:lstStyle/>
-          <a:p>
-            <a:pPr>
-              <a:spcAft>
                 <a:spcPts val="1170"/>
               </a:spcAft>
             </a:pPr>
             <a:r>
-              <a:rPr sz="2600" b="1">
-                <a:solidFill>
-                  <a:srgbClr val="E8793A"/>
-                </a:solidFill>
-                <a:latin typeface="Nunito Sans"/>
-              </a:rPr>
-              <a:t>• </a:t>
-            </a:r>
-            <a:r>
               <a:rPr sz="2600" b="0">
                 <a:solidFill>
-                  <a:srgbClr val="1F2A44"/>
-                </a:solidFill>
-                <a:latin typeface="Nunito Sans"/>
-              </a:rPr>
-              <a:t>Cambiar lo que dijo la otra persona</a:t>
-            </a:r>
-          </a:p>
-          <a:p>
-            <a:pPr>
-              <a:spcAft>
-                <a:spcPts val="1170"/>
-              </a:spcAft>
-            </a:pPr>
-            <a:r>
-              <a:rPr sz="2600" b="1">
-                <a:solidFill>
-                  <a:srgbClr val="E8793A"/>
-                </a:solidFill>
-                <a:latin typeface="Nunito Sans"/>
-              </a:rPr>
-              <a:t>• </a:t>
-            </a:r>
-            <a:r>
-              <a:rPr sz="2600" b="0">
-                <a:solidFill>
-                  <a:srgbClr val="1F2A44"/>
-                </a:solidFill>
-                <a:latin typeface="Nunito Sans"/>
-              </a:rPr>
-              <a:t>Añadir premisas que nadie pensaba</a:t>
-            </a:r>
-          </a:p>
-          <a:p>
-            <a:pPr>
-              <a:spcAft>
-                <a:spcPts val="1170"/>
-              </a:spcAft>
-            </a:pPr>
-            <a:r>
-              <a:rPr sz="2600" b="1">
-                <a:solidFill>
-                  <a:srgbClr val="E8793A"/>
-                </a:solidFill>
-                <a:latin typeface="Nunito Sans"/>
-              </a:rPr>
-              <a:t>• </a:t>
-            </a:r>
-            <a:r>
-              <a:rPr sz="2600" b="0">
-                <a:solidFill>
-                  <a:srgbClr val="1F2A44"/>
-                </a:solidFill>
-                <a:latin typeface="Nunito Sans"/>
-              </a:rPr>
-              <a:t>Dejar insultos como si fueran razones</a:t>
-            </a:r>
-          </a:p>
-        </p:txBody>
-      </p:sp>
-      <p:sp>
-        <p:nvSpPr>
-          <p:cNvPr id="7" name="Rectangle 6"/>
-          <p:cNvSpPr/>
-          <p:nvPr/>
-        </p:nvSpPr>
-        <p:spPr>
-          <a:xfrm>
-            <a:off x="6246000" y="1650000"/>
-            <a:ext cx="5306000" cy="4400000"/>
-          </a:xfrm>
-          <a:prstGeom prst="rect">
-            <a:avLst/>
-          </a:prstGeom>
-          <a:solidFill>
-            <a:srgbClr val="EAF0F7"/>
-          </a:solidFill>
-          <a:ln>
-            <a:noFill/>
-          </a:ln>
-        </p:spPr>
-        <p:style>
-          <a:lnRef idx="1">
-            <a:schemeClr val="accent1"/>
-          </a:lnRef>
-          <a:fillRef idx="3">
-            <a:schemeClr val="accent1"/>
-          </a:fillRef>
-          <a:effectRef idx="2">
-            <a:schemeClr val="accent1"/>
-          </a:effectRef>
-          <a:fontRef idx="minor">
-            <a:schemeClr val="lt1"/>
-          </a:fontRef>
-        </p:style>
-        <p:txBody>
-          <a:bodyPr rtlCol="0" anchor="ctr"/>
-          <a:lstStyle/>
-          <a:p>
-            <a:pPr algn="ctr"/>
-          </a:p>
-        </p:txBody>
-      </p:sp>
-      <p:sp>
-        <p:nvSpPr>
-          <p:cNvPr id="8" name="TextBox 7"/>
-          <p:cNvSpPr txBox="1"/>
-          <p:nvPr/>
-        </p:nvSpPr>
-        <p:spPr>
-          <a:xfrm>
-            <a:off x="6446000" y="1750000"/>
-            <a:ext cx="4906000" cy="600000"/>
-          </a:xfrm>
-          <a:prstGeom prst="rect">
-            <a:avLst/>
-          </a:prstGeom>
-          <a:noFill/>
-        </p:spPr>
-        <p:txBody>
-          <a:bodyPr wrap="square">
-            <a:spAutoFit/>
-          </a:bodyPr>
-          <a:lstStyle/>
-          <a:p>
-            <a:pPr>
-              <a:spcAft>
-                <a:spcPts val="1260"/>
-              </a:spcAft>
-            </a:pPr>
-            <a:r>
-              <a:rPr sz="2800" b="1">
-                <a:solidFill>
-                  <a:srgbClr val="2F6FB5"/>
-                </a:solidFill>
-                <a:latin typeface="Nunito Sans"/>
-              </a:rPr>
-              <a:t>Mejor así</a:t>
-            </a:r>
-          </a:p>
-        </p:txBody>
-      </p:sp>
-      <p:sp>
-        <p:nvSpPr>
-          <p:cNvPr id="9" name="TextBox 8"/>
-          <p:cNvSpPr txBox="1"/>
-          <p:nvPr/>
-        </p:nvSpPr>
-        <p:spPr>
-          <a:xfrm>
-            <a:off x="6446000" y="2400000"/>
-            <a:ext cx="4906000" cy="3500000"/>
-          </a:xfrm>
-          <a:prstGeom prst="rect">
-            <a:avLst/>
-          </a:prstGeom>
-          <a:noFill/>
-        </p:spPr>
-        <p:txBody>
-          <a:bodyPr wrap="square">
-            <a:spAutoFit/>
-          </a:bodyPr>
-          <a:lstStyle/>
-          <a:p>
-            <a:pPr>
-              <a:spcAft>
-                <a:spcPts val="1170"/>
-              </a:spcAft>
-            </a:pPr>
-            <a:r>
-              <a:rPr sz="2600" b="1">
-                <a:solidFill>
-                  <a:srgbClr val="E8793A"/>
-                </a:solidFill>
-                <a:latin typeface="Nunito Sans"/>
-              </a:rPr>
-              <a:t>• </a:t>
-            </a:r>
-            <a:r>
-              <a:rPr sz="2600" b="0">
-                <a:solidFill>
-                  <a:srgbClr val="1F2A44"/>
-                </a:solidFill>
-                <a:latin typeface="Nunito Sans"/>
-              </a:rPr>
-              <a:t>Respetar lo que dijo</a:t>
-            </a:r>
-          </a:p>
-          <a:p>
-            <a:pPr>
-              <a:spcAft>
-                <a:spcPts val="1170"/>
-              </a:spcAft>
-            </a:pPr>
-            <a:r>
-              <a:rPr sz="2600" b="1">
-                <a:solidFill>
-                  <a:srgbClr val="E8793A"/>
-                </a:solidFill>
-                <a:latin typeface="Nunito Sans"/>
-              </a:rPr>
-              <a:t>• </a:t>
-            </a:r>
-            <a:r>
-              <a:rPr sz="2600" b="0">
-                <a:solidFill>
-                  <a:srgbClr val="1F2A44"/>
-                </a:solidFill>
-                <a:latin typeface="Nunito Sans"/>
-              </a:rPr>
-              <a:t>Añadir solo lo que hace falta</a:t>
-            </a:r>
-          </a:p>
-          <a:p>
-            <a:pPr>
-              <a:spcAft>
-                <a:spcPts val="1170"/>
-              </a:spcAft>
-            </a:pPr>
-            <a:r>
-              <a:rPr sz="2600" b="1">
-                <a:solidFill>
-                  <a:srgbClr val="E8793A"/>
-                </a:solidFill>
-                <a:latin typeface="Nunito Sans"/>
-              </a:rPr>
-              <a:t>• </a:t>
-            </a:r>
-            <a:r>
-              <a:rPr sz="2600" b="0">
-                <a:solidFill>
-                  <a:srgbClr val="1F2A44"/>
-                </a:solidFill>
-                <a:latin typeface="Nunito Sans"/>
-              </a:rPr>
-              <a:t>Quitar lo que no es una razón</a:t>
+                  <a:srgbClr val="4A5568"/>
+                </a:solidFill>
+                <a:latin typeface="Nunito Sans"/>
+              </a:rPr>
+              <a:t>Dos minutos. Después lo comparamos.</a:t>
             </a:r>
           </a:p>
         </p:txBody>
@@ -5178,358 +5031,6 @@
 </file>
 
 <file path=ppt/slides/slide15.xml><?xml version="1.0" encoding="utf-8"?>
-<p:sld xmlns:a="http://schemas.openxmlformats.org/drawingml/2006/main" xmlns:p="http://schemas.openxmlformats.org/presentationml/2006/main" xmlns:r="http://schemas.openxmlformats.org/officeDocument/2006/relationships">
-  <p:cSld>
-    <p:bg>
-      <p:bgPr>
-        <a:solidFill>
-          <a:srgbClr val="F6C9A8"/>
-        </a:solidFill>
-        <a:effectLst/>
-      </p:bgPr>
-    </p:bg>
-    <p:spTree>
-      <p:nvGrpSpPr>
-        <p:cNvPr id="1" name=""/>
-        <p:cNvGrpSpPr/>
-        <p:nvPr/>
-      </p:nvGrpSpPr>
-      <p:grpSpPr/>
-      <p:sp>
-        <p:nvSpPr>
-          <p:cNvPr id="2" name="TextBox 1"/>
-          <p:cNvSpPr txBox="1"/>
-          <p:nvPr/>
-        </p:nvSpPr>
-        <p:spPr>
-          <a:xfrm>
-            <a:off x="640000" y="380000"/>
-            <a:ext cx="10912000" cy="420000"/>
-          </a:xfrm>
-          <a:prstGeom prst="rect">
-            <a:avLst/>
-          </a:prstGeom>
-          <a:noFill/>
-        </p:spPr>
-        <p:txBody>
-          <a:bodyPr wrap="square">
-            <a:spAutoFit/>
-          </a:bodyPr>
-          <a:lstStyle/>
-          <a:p>
-            <a:pPr>
-              <a:spcAft>
-                <a:spcPts val="630"/>
-              </a:spcAft>
-            </a:pPr>
-            <a:r>
-              <a:rPr sz="1400" b="1">
-                <a:solidFill>
-                  <a:srgbClr val="1F2A44"/>
-                </a:solidFill>
-                <a:latin typeface="Nunito Sans"/>
-              </a:rPr>
-              <a:t>CASO TRAMPA · BLOQUE 3 · RECONSTRUIR CON JUSTICIA</a:t>
-            </a:r>
-          </a:p>
-        </p:txBody>
-      </p:sp>
-      <p:sp>
-        <p:nvSpPr>
-          <p:cNvPr id="3" name="TextBox 2"/>
-          <p:cNvSpPr txBox="1"/>
-          <p:nvPr/>
-        </p:nvSpPr>
-        <p:spPr>
-          <a:xfrm>
-            <a:off x="640000" y="760000"/>
-            <a:ext cx="10912000" cy="800000"/>
-          </a:xfrm>
-          <a:prstGeom prst="rect">
-            <a:avLst/>
-          </a:prstGeom>
-          <a:noFill/>
-        </p:spPr>
-        <p:txBody>
-          <a:bodyPr wrap="square">
-            <a:spAutoFit/>
-          </a:bodyPr>
-          <a:lstStyle/>
-          <a:p>
-            <a:pPr>
-              <a:spcAft>
-                <a:spcPts val="1710"/>
-              </a:spcAft>
-            </a:pPr>
-            <a:r>
-              <a:rPr sz="3800" b="1">
-                <a:solidFill>
-                  <a:srgbClr val="1F2A44"/>
-                </a:solidFill>
-                <a:latin typeface="Fredoka"/>
-              </a:rPr>
-              <a:t>⚠ ¿Qué premisa oculta elijo?</a:t>
-            </a:r>
-          </a:p>
-        </p:txBody>
-      </p:sp>
-      <p:sp>
-        <p:nvSpPr>
-          <p:cNvPr id="4" name="Rectangle 3"/>
-          <p:cNvSpPr/>
-          <p:nvPr/>
-        </p:nvSpPr>
-        <p:spPr>
-          <a:xfrm>
-            <a:off x="640000" y="1600000"/>
-            <a:ext cx="10912000" cy="1100000"/>
-          </a:xfrm>
-          <a:prstGeom prst="rect">
-            <a:avLst/>
-          </a:prstGeom>
-          <a:solidFill>
-            <a:srgbClr val="FBF7EF"/>
-          </a:solidFill>
-          <a:ln>
-            <a:noFill/>
-          </a:ln>
-        </p:spPr>
-        <p:style>
-          <a:lnRef idx="1">
-            <a:schemeClr val="accent1"/>
-          </a:lnRef>
-          <a:fillRef idx="3">
-            <a:schemeClr val="accent1"/>
-          </a:fillRef>
-          <a:effectRef idx="2">
-            <a:schemeClr val="accent1"/>
-          </a:effectRef>
-          <a:fontRef idx="minor">
-            <a:schemeClr val="lt1"/>
-          </a:fontRef>
-        </p:style>
-        <p:txBody>
-          <a:bodyPr rtlCol="0" anchor="ctr"/>
-          <a:lstStyle/>
-          <a:p>
-            <a:pPr algn="ctr"/>
-          </a:p>
-        </p:txBody>
-      </p:sp>
-      <p:sp>
-        <p:nvSpPr>
-          <p:cNvPr id="5" name="TextBox 4"/>
-          <p:cNvSpPr txBox="1"/>
-          <p:nvPr/>
-        </p:nvSpPr>
-        <p:spPr>
-          <a:xfrm>
-            <a:off x="840000" y="1650000"/>
-            <a:ext cx="10512000" cy="1000000"/>
-          </a:xfrm>
-          <a:prstGeom prst="rect">
-            <a:avLst/>
-          </a:prstGeom>
-          <a:noFill/>
-        </p:spPr>
-        <p:txBody>
-          <a:bodyPr wrap="square" anchor="ctr">
-            <a:spAutoFit/>
-          </a:bodyPr>
-          <a:lstStyle/>
-          <a:p>
-            <a:pPr>
-              <a:spcAft>
-                <a:spcPts val="1170"/>
-              </a:spcAft>
-            </a:pPr>
-            <a:r>
-              <a:rPr sz="2600" b="1">
-                <a:solidFill>
-                  <a:srgbClr val="1F2A44"/>
-                </a:solidFill>
-                <a:latin typeface="Nunito Sans"/>
-              </a:rPr>
-              <a:t>«Un chico no puede llevar la moto de su tío: tiene 13 años.»</a:t>
-            </a:r>
-          </a:p>
-        </p:txBody>
-      </p:sp>
-      <p:sp>
-        <p:nvSpPr>
-          <p:cNvPr id="6" name="TextBox 5"/>
-          <p:cNvSpPr txBox="1"/>
-          <p:nvPr/>
-        </p:nvSpPr>
-        <p:spPr>
-          <a:xfrm>
-            <a:off x="640000" y="2900000"/>
-            <a:ext cx="10912000" cy="3500000"/>
-          </a:xfrm>
-          <a:prstGeom prst="rect">
-            <a:avLst/>
-          </a:prstGeom>
-          <a:noFill/>
-        </p:spPr>
-        <p:txBody>
-          <a:bodyPr wrap="square">
-            <a:spAutoFit/>
-          </a:bodyPr>
-          <a:lstStyle/>
-          <a:p>
-            <a:pPr>
-              <a:spcAft>
-                <a:spcPts val="1080"/>
-              </a:spcAft>
-            </a:pPr>
-            <a:r>
-              <a:rPr sz="2400" b="1">
-                <a:solidFill>
-                  <a:srgbClr val="E8793A"/>
-                </a:solidFill>
-                <a:latin typeface="Nunito Sans"/>
-              </a:rPr>
-              <a:t>1. </a:t>
-            </a:r>
-            <a:r>
-              <a:rPr sz="2400" b="0">
-                <a:solidFill>
-                  <a:srgbClr val="1F2A44"/>
-                </a:solidFill>
-                <a:latin typeface="Nunito Sans"/>
-              </a:rPr>
-              <a:t>¿La premisa oculta es «los de 13 años conducen mal»? Entonces el argumento falla, ¿no?</a:t>
-            </a:r>
-          </a:p>
-          <a:p>
-            <a:pPr>
-              <a:spcAft>
-                <a:spcPts val="1080"/>
-              </a:spcAft>
-            </a:pPr>
-            <a:r>
-              <a:rPr sz="2400" b="1">
-                <a:solidFill>
-                  <a:srgbClr val="E8793A"/>
-                </a:solidFill>
-                <a:latin typeface="Nunito Sans"/>
-              </a:rPr>
-              <a:t>2. </a:t>
-            </a:r>
-            <a:r>
-              <a:rPr sz="2400" b="0">
-                <a:solidFill>
-                  <a:srgbClr val="1F2A44"/>
-                </a:solidFill>
-                <a:latin typeface="Nunito Sans"/>
-              </a:rPr>
-              <a:t>Esa premisa sería dudosa: no todos los de 13 años conducirían mal.</a:t>
-            </a:r>
-          </a:p>
-          <a:p>
-            <a:pPr>
-              <a:spcAft>
-                <a:spcPts val="1080"/>
-              </a:spcAft>
-            </a:pPr>
-            <a:r>
-              <a:rPr sz="2400" b="1">
-                <a:solidFill>
-                  <a:srgbClr val="E8793A"/>
-                </a:solidFill>
-                <a:latin typeface="Nunito Sans"/>
-              </a:rPr>
-              <a:t>3. </a:t>
-            </a:r>
-            <a:r>
-              <a:rPr sz="2400" b="0">
-                <a:solidFill>
-                  <a:srgbClr val="1F2A44"/>
-                </a:solidFill>
-                <a:latin typeface="Nunito Sans"/>
-              </a:rPr>
-              <a:t>Pero otra también lleva a la C, y es verdad: «la ley no deja llevar moto a los 13».</a:t>
-            </a:r>
-          </a:p>
-          <a:p>
-            <a:pPr>
-              <a:spcAft>
-                <a:spcPts val="1080"/>
-              </a:spcAft>
-            </a:pPr>
-            <a:r>
-              <a:rPr sz="2400" b="1">
-                <a:solidFill>
-                  <a:srgbClr val="E8793A"/>
-                </a:solidFill>
-                <a:latin typeface="Nunito Sans"/>
-              </a:rPr>
-              <a:t>4. </a:t>
-            </a:r>
-            <a:r>
-              <a:rPr sz="2400" b="0">
-                <a:solidFill>
-                  <a:srgbClr val="1F2A44"/>
-                </a:solidFill>
-                <a:latin typeface="Nunito Sans"/>
-              </a:rPr>
-              <a:t>Al reconstruir, elijo la premisa más </a:t>
-            </a:r>
-            <a:r>
-              <a:rPr sz="2400" b="1">
-                <a:solidFill>
-                  <a:srgbClr val="1F2A44"/>
-                </a:solidFill>
-                <a:latin typeface="Nunito Sans"/>
-              </a:rPr>
-              <a:t>razonable</a:t>
-            </a:r>
-            <a:r>
-              <a:rPr sz="2400" b="0">
-                <a:solidFill>
-                  <a:srgbClr val="1F2A44"/>
-                </a:solidFill>
-                <a:latin typeface="Nunito Sans"/>
-              </a:rPr>
-              <a:t>: la que pensaría quien habla.</a:t>
-            </a:r>
-          </a:p>
-          <a:p>
-            <a:pPr>
-              <a:spcAft>
-                <a:spcPts val="1080"/>
-              </a:spcAft>
-            </a:pPr>
-            <a:r>
-              <a:rPr sz="2400" b="1">
-                <a:solidFill>
-                  <a:srgbClr val="E8793A"/>
-                </a:solidFill>
-                <a:latin typeface="Nunito Sans"/>
-              </a:rPr>
-              <a:t>5. </a:t>
-            </a:r>
-            <a:r>
-              <a:rPr sz="2400" b="0">
-                <a:solidFill>
-                  <a:srgbClr val="1F2A44"/>
-                </a:solidFill>
-                <a:latin typeface="Nunito Sans"/>
-              </a:rPr>
-              <a:t>Conclusión: si eliges la premisa más débil, atacas un argumento que nadie ha hecho.</a:t>
-            </a:r>
-          </a:p>
-        </p:txBody>
-      </p:sp>
-    </p:spTree>
-  </p:cSld>
-  <p:clrMapOvr>
-    <a:masterClrMapping/>
-  </p:clrMapOvr>
-</p:sld>
-</file>
-
-<file path=ppt/slides/slide16.xml><?xml version="1.0" encoding="utf-8"?>
 <p:sld xmlns:a="http://schemas.openxmlformats.org/drawingml/2006/main" xmlns:p="http://schemas.openxmlformats.org/presentationml/2006/main" xmlns:r="http://schemas.openxmlformats.org/officeDocument/2006/relationships">
   <p:cSld>
     <p:bg>
@@ -5594,8 +5095,8 @@
         </p:nvSpPr>
         <p:spPr>
           <a:xfrm>
-            <a:off x="640000" y="760000"/>
-            <a:ext cx="10912000" cy="800000"/>
+            <a:off x="640000" y="1300000"/>
+            <a:ext cx="10912000" cy="4800000"/>
           </a:xfrm>
           <a:prstGeom prst="rect">
             <a:avLst/>
@@ -5610,56 +5111,76 @@
           <a:p>
             <a:pPr>
               <a:spcAft>
-                <a:spcPts val="1710"/>
-              </a:spcAft>
-            </a:pPr>
-            <a:r>
-              <a:rPr sz="3800" b="1">
+                <a:spcPts val="1350"/>
+              </a:spcAft>
+            </a:pPr>
+            <a:r>
+              <a:rPr sz="3000" b="1">
+                <a:solidFill>
+                  <a:srgbClr val="E8793A"/>
+                </a:solidFill>
+                <a:latin typeface="Nunito Sans"/>
+              </a:rPr>
+              <a:t>1. </a:t>
+            </a:r>
+            <a:r>
+              <a:rPr sz="3000" b="0">
                 <a:solidFill>
                   <a:srgbClr val="1F2A44"/>
                 </a:solidFill>
-                <a:latin typeface="Fredoka"/>
-              </a:rPr>
-              <a:t>Escríbelo tú primero, sin mirar</a:t>
-            </a:r>
-          </a:p>
-        </p:txBody>
-      </p:sp>
-      <p:sp>
-        <p:nvSpPr>
-          <p:cNvPr id="4" name="TextBox 3"/>
-          <p:cNvSpPr txBox="1"/>
-          <p:nvPr/>
-        </p:nvSpPr>
-        <p:spPr>
-          <a:xfrm>
-            <a:off x="640000" y="1800000"/>
-            <a:ext cx="10912000" cy="1500000"/>
-          </a:xfrm>
-          <a:prstGeom prst="rect">
-            <a:avLst/>
-          </a:prstGeom>
-          <a:noFill/>
-        </p:spPr>
-        <p:txBody>
-          <a:bodyPr wrap="square">
-            <a:spAutoFit/>
-          </a:bodyPr>
-          <a:lstStyle/>
-          <a:p>
-            <a:pPr>
-              <a:spcAft>
-                <a:spcPts val="1170"/>
-              </a:spcAft>
-            </a:pPr>
-            <a:r>
-              <a:rPr sz="2600" b="0">
-                <a:solidFill>
-                  <a:srgbClr val="4A5568"/>
-                </a:solidFill>
-                <a:latin typeface="Nunito Sans"/>
-              </a:rPr>
-              <a:t>Dos minutos. Después lo comparamos.</a:t>
+                <a:latin typeface="Nunito Sans"/>
+              </a:rPr>
+              <a:t>La falacia de autoridad es creer algo solo porque lo dice alguien importante que no sabe del tema.</a:t>
+            </a:r>
+          </a:p>
+          <a:p>
+            <a:pPr>
+              <a:spcAft>
+                <a:spcPts val="1350"/>
+              </a:spcAft>
+            </a:pPr>
+            <a:r>
+              <a:rPr sz="3000" b="1">
+                <a:solidFill>
+                  <a:srgbClr val="E8793A"/>
+                </a:solidFill>
+                <a:latin typeface="Nunito Sans"/>
+              </a:rPr>
+              <a:t>2. </a:t>
+            </a:r>
+            <a:r>
+              <a:rPr sz="3000" b="0">
+                <a:solidFill>
+                  <a:srgbClr val="1F2A44"/>
+                </a:solidFill>
+                <a:latin typeface="Nunito Sans"/>
+              </a:rPr>
+              <a:t>Sus trucos: el famoso, la bata blanca y «los expertos dicen».</a:t>
+            </a:r>
+          </a:p>
+          <a:p>
+            <a:pPr>
+              <a:spcAft>
+                <a:spcPts val="1350"/>
+              </a:spcAft>
+            </a:pPr>
+            <a:r>
+              <a:rPr sz="3000" b="1">
+                <a:solidFill>
+                  <a:srgbClr val="E8793A"/>
+                </a:solidFill>
+                <a:latin typeface="Nunito Sans"/>
+              </a:rPr>
+              <a:t>3. </a:t>
+            </a:r>
+            <a:r>
+              <a:rPr sz="3000" b="0">
+                <a:solidFill>
+                  <a:srgbClr val="1F2A44"/>
+                </a:solidFill>
+                <a:latin typeface="Nunito Sans"/>
+              </a:rPr>
+              <a:t>Fiarse de un experto de verdad, en su campo y con pruebas, no es falacia.</a:t>
             </a:r>
           </a:p>
         </p:txBody>
@@ -5672,170 +5193,7 @@
 </p:sld>
 </file>
 
-<file path=ppt/slides/slide17.xml><?xml version="1.0" encoding="utf-8"?>
-<p:sld xmlns:a="http://schemas.openxmlformats.org/drawingml/2006/main" xmlns:p="http://schemas.openxmlformats.org/presentationml/2006/main" xmlns:r="http://schemas.openxmlformats.org/officeDocument/2006/relationships">
-  <p:cSld>
-    <p:bg>
-      <p:bgPr>
-        <a:solidFill>
-          <a:srgbClr val="FBF7EF"/>
-        </a:solidFill>
-        <a:effectLst/>
-      </p:bgPr>
-    </p:bg>
-    <p:spTree>
-      <p:nvGrpSpPr>
-        <p:cNvPr id="1" name=""/>
-        <p:cNvGrpSpPr/>
-        <p:nvPr/>
-      </p:nvGrpSpPr>
-      <p:grpSpPr/>
-      <p:sp>
-        <p:nvSpPr>
-          <p:cNvPr id="2" name="TextBox 1"/>
-          <p:cNvSpPr txBox="1"/>
-          <p:nvPr/>
-        </p:nvSpPr>
-        <p:spPr>
-          <a:xfrm>
-            <a:off x="640000" y="380000"/>
-            <a:ext cx="10912000" cy="420000"/>
-          </a:xfrm>
-          <a:prstGeom prst="rect">
-            <a:avLst/>
-          </a:prstGeom>
-          <a:noFill/>
-        </p:spPr>
-        <p:txBody>
-          <a:bodyPr wrap="square">
-            <a:spAutoFit/>
-          </a:bodyPr>
-          <a:lstStyle/>
-          <a:p>
-            <a:pPr>
-              <a:spcAft>
-                <a:spcPts val="630"/>
-              </a:spcAft>
-            </a:pPr>
-            <a:r>
-              <a:rPr sz="1400" b="1">
-                <a:solidFill>
-                  <a:srgbClr val="E8793A"/>
-                </a:solidFill>
-                <a:latin typeface="Nunito Sans"/>
-              </a:rPr>
-              <a:t>LO DE HOY EN TRES LÍNEAS</a:t>
-            </a:r>
-          </a:p>
-        </p:txBody>
-      </p:sp>
-      <p:sp>
-        <p:nvSpPr>
-          <p:cNvPr id="3" name="TextBox 2"/>
-          <p:cNvSpPr txBox="1"/>
-          <p:nvPr/>
-        </p:nvSpPr>
-        <p:spPr>
-          <a:xfrm>
-            <a:off x="640000" y="1300000"/>
-            <a:ext cx="10912000" cy="4800000"/>
-          </a:xfrm>
-          <a:prstGeom prst="rect">
-            <a:avLst/>
-          </a:prstGeom>
-          <a:noFill/>
-        </p:spPr>
-        <p:txBody>
-          <a:bodyPr wrap="square">
-            <a:spAutoFit/>
-          </a:bodyPr>
-          <a:lstStyle/>
-          <a:p>
-            <a:pPr>
-              <a:spcAft>
-                <a:spcPts val="1350"/>
-              </a:spcAft>
-            </a:pPr>
-            <a:r>
-              <a:rPr sz="3000" b="1">
-                <a:solidFill>
-                  <a:srgbClr val="E8793A"/>
-                </a:solidFill>
-                <a:latin typeface="Nunito Sans"/>
-              </a:rPr>
-              <a:t>1. </a:t>
-            </a:r>
-            <a:r>
-              <a:rPr sz="3000" b="0">
-                <a:solidFill>
-                  <a:srgbClr val="1F2A44"/>
-                </a:solidFill>
-                <a:latin typeface="Nunito Sans"/>
-              </a:rPr>
-              <a:t>Reconstruir es escribir el argumento ordenado: premisas arriba, conclusión abajo.</a:t>
-            </a:r>
-          </a:p>
-          <a:p>
-            <a:pPr>
-              <a:spcAft>
-                <a:spcPts val="1350"/>
-              </a:spcAft>
-            </a:pPr>
-            <a:r>
-              <a:rPr sz="3000" b="1">
-                <a:solidFill>
-                  <a:srgbClr val="E8793A"/>
-                </a:solidFill>
-                <a:latin typeface="Nunito Sans"/>
-              </a:rPr>
-              <a:t>2. </a:t>
-            </a:r>
-            <a:r>
-              <a:rPr sz="3000" b="0">
-                <a:solidFill>
-                  <a:srgbClr val="1F2A44"/>
-                </a:solidFill>
-                <a:latin typeface="Nunito Sans"/>
-              </a:rPr>
-              <a:t>Una premisa oculta no se dice, pero hace falta para llegar a la conclusión.</a:t>
-            </a:r>
-          </a:p>
-          <a:p>
-            <a:pPr>
-              <a:spcAft>
-                <a:spcPts val="1350"/>
-              </a:spcAft>
-            </a:pPr>
-            <a:r>
-              <a:rPr sz="3000" b="1">
-                <a:solidFill>
-                  <a:srgbClr val="E8793A"/>
-                </a:solidFill>
-                <a:latin typeface="Nunito Sans"/>
-              </a:rPr>
-              <a:t>3. </a:t>
-            </a:r>
-            <a:r>
-              <a:rPr sz="3000" b="0">
-                <a:solidFill>
-                  <a:srgbClr val="1F2A44"/>
-                </a:solidFill>
-                <a:latin typeface="Nunito Sans"/>
-              </a:rPr>
-              <a:t>Escribir la premisa oculta ayuda a ver si el argumento se sostiene.</a:t>
-            </a:r>
-          </a:p>
-        </p:txBody>
-      </p:sp>
-    </p:spTree>
-  </p:cSld>
-  <p:clrMapOvr>
-    <a:masterClrMapping/>
-  </p:clrMapOvr>
-</p:sld>
-</file>
-
-<file path=ppt/slides/slide18.xml><?xml version="1.0" encoding="utf-8"?>
+<file path=ppt/slides/slide16.xml><?xml version="1.0" encoding="utf-8"?>
 <p:sld xmlns:a="http://schemas.openxmlformats.org/drawingml/2006/main" xmlns:p="http://schemas.openxmlformats.org/presentationml/2006/main" xmlns:r="http://schemas.openxmlformats.org/officeDocument/2006/relationships">
   <p:cSld>
     <p:bg>
@@ -5926,7 +5284,7 @@
                 </a:solidFill>
                 <a:latin typeface="Fredoka"/>
               </a:rPr>
-              <a:t>Premisas implícitas u ocultas en un argumento</a:t>
+              <a:t>La falacia de autoridad con ejemplos de anuncios</a:t>
             </a:r>
           </a:p>
         </p:txBody>
@@ -5965,7 +5323,7 @@
                 </a:solidFill>
                 <a:latin typeface="Nunito Sans"/>
               </a:rPr>
-              <a:t>Ver más ejemplos de razones que no se dicen pero que sostienen un argumento.</a:t>
+              <a:t>Que reconozcan los trucos del famoso y de la bata blanca en anuncios reales.</a:t>
             </a:r>
           </a:p>
         </p:txBody>
@@ -5978,7 +5336,7 @@
 </p:sld>
 </file>
 
-<file path=ppt/slides/slide19.xml><?xml version="1.0" encoding="utf-8"?>
+<file path=ppt/slides/slide17.xml><?xml version="1.0" encoding="utf-8"?>
 <p:sld xmlns:a="http://schemas.openxmlformats.org/drawingml/2006/main" xmlns:p="http://schemas.openxmlformats.org/presentationml/2006/main" xmlns:r="http://schemas.openxmlformats.org/officeDocument/2006/relationships">
   <p:cSld>
     <p:bg>
@@ -6623,7 +5981,7 @@
                 </a:solidFill>
                 <a:latin typeface="Nunito Sans"/>
               </a:rPr>
-              <a:t>Las premisas son las ______ que doy para que aceptes la conclusión.  (sesión 7)</a:t>
+              <a:t>Para mirar los intereses de un experto pregunto: ¿______ algo si le creo?  (sesión 7)</a:t>
             </a:r>
           </a:p>
           <a:p>
@@ -6648,7 +6006,7 @@
                 </a:solidFill>
                 <a:latin typeface="Nunito Sans"/>
               </a:rPr>
-              <a:t>Las palabras pista como «porque» o «por tanto» se llaman ______.  (sesión 7)</a:t>
+              <a:t>En redes, «colaboración ______» quiere decir que le pagan por decirlo.  (sesión 7)</a:t>
             </a:r>
           </a:p>
           <a:p>
@@ -6673,7 +6031,7 @@
                 </a:solidFill>
                 <a:latin typeface="Nunito Sans"/>
               </a:rPr>
-              <a:t>Sentirse seguro es un ______, no una razón.  (sesión 3)</a:t>
+              <a:t>Creer algo porque lo dice alguien importante es el camino de la ______.  (sesión 3)</a:t>
             </a:r>
           </a:p>
         </p:txBody>
@@ -6825,7 +6183,7 @@
                 </a:solidFill>
                 <a:latin typeface="Nunito Sans"/>
               </a:rPr>
-              <a:t>Las premisas son las </a:t>
+              <a:t>Para mirar los intereses de un experto pregunto: ¿</a:t>
             </a:r>
             <a:r>
               <a:rPr sz="2600" b="1">
@@ -6834,7 +6192,7 @@
                 </a:solidFill>
                 <a:latin typeface="Nunito Sans"/>
               </a:rPr>
-              <a:t>razones</a:t>
+              <a:t>Gana</a:t>
             </a:r>
             <a:r>
               <a:rPr sz="2600" b="0">
@@ -6843,7 +6201,7 @@
                 </a:solidFill>
                 <a:latin typeface="Nunito Sans"/>
               </a:rPr>
-              <a:t> que doy para que aceptes la conclusión.  (sesión 7)</a:t>
+              <a:t> algo si le creo?  (sesión 7)</a:t>
             </a:r>
           </a:p>
           <a:p>
@@ -6868,7 +6226,7 @@
                 </a:solidFill>
                 <a:latin typeface="Nunito Sans"/>
               </a:rPr>
-              <a:t>Las palabras pista como «porque» o «por tanto» se llaman </a:t>
+              <a:t>En redes, «colaboración </a:t>
             </a:r>
             <a:r>
               <a:rPr sz="2600" b="1">
@@ -6877,7 +6235,7 @@
                 </a:solidFill>
                 <a:latin typeface="Nunito Sans"/>
               </a:rPr>
-              <a:t>indicadores</a:t>
+              <a:t>pagada</a:t>
             </a:r>
             <a:r>
               <a:rPr sz="2600" b="0">
@@ -6886,7 +6244,7 @@
                 </a:solidFill>
                 <a:latin typeface="Nunito Sans"/>
               </a:rPr>
-              <a:t>.  (sesión 7)</a:t>
+              <a:t>» quiere decir que le pagan por decirlo.  (sesión 7)</a:t>
             </a:r>
           </a:p>
           <a:p>
@@ -6911,7 +6269,7 @@
                 </a:solidFill>
                 <a:latin typeface="Nunito Sans"/>
               </a:rPr>
-              <a:t>Sentirse seguro es un </a:t>
+              <a:t>Creer algo porque lo dice alguien importante es el camino de la </a:t>
             </a:r>
             <a:r>
               <a:rPr sz="2600" b="1">
@@ -6920,7 +6278,7 @@
                 </a:solidFill>
                 <a:latin typeface="Nunito Sans"/>
               </a:rPr>
-              <a:t>sentimiento</a:t>
+              <a:t>autoridad</a:t>
             </a:r>
             <a:r>
               <a:rPr sz="2600" b="0">
@@ -6929,7 +6287,7 @@
                 </a:solidFill>
                 <a:latin typeface="Nunito Sans"/>
               </a:rPr>
-              <a:t>, no una razón.  (sesión 3)</a:t>
+              <a:t>.  (sesión 3)</a:t>
             </a:r>
           </a:p>
         </p:txBody>
@@ -7076,7 +6434,7 @@
                 </a:solidFill>
                 <a:latin typeface="Nunito Sans"/>
               </a:rPr>
-              <a:t>«Un chico no puede ser el portero: lleva gafas.»</a:t>
+              <a:t>«Nueve de cada diez dentistas lo recomiendan.» Lo has oído en algún anuncio.</a:t>
             </a:r>
           </a:p>
         </p:txBody>
@@ -7115,7 +6473,7 @@
                 </a:solidFill>
                 <a:latin typeface="Nunito Sans"/>
               </a:rPr>
-              <a:t>¿Qué está pensando, sin decirlo, quien dice esto?</a:t>
+              <a:t>¿Quiénes son esos dentistas? ¿Cómo podrías saberlo?</a:t>
             </a:r>
           </a:p>
         </p:txBody>
@@ -7219,7 +6577,7 @@
                 </a:solidFill>
                 <a:latin typeface="Fredoka"/>
               </a:rPr>
-              <a:t>Ordenar un argumento</a:t>
+              <a:t>Qué es la falacia de autoridad</a:t>
             </a:r>
           </a:p>
         </p:txBody>
@@ -7284,7 +6642,7 @@
                 </a:solidFill>
                 <a:latin typeface="Nunito Sans"/>
               </a:rPr>
-              <a:t>BLOQUE 1 · ORDENAR UN ARGUMENTO</a:t>
+              <a:t>BLOQUE 1 · QUÉ ES LA FALACIA DE AUTORIDAD</a:t>
             </a:r>
           </a:p>
         </p:txBody>
@@ -7323,7 +6681,7 @@
                 </a:solidFill>
                 <a:latin typeface="Fredoka"/>
               </a:rPr>
-              <a:t>Reconstruir</a:t>
+              <a:t>Falacia de autoridad (ad verecundiam)</a:t>
             </a:r>
           </a:p>
         </p:txBody>
@@ -7405,25 +6763,7 @@
                 </a:solidFill>
                 <a:latin typeface="Nunito Sans"/>
               </a:rPr>
-              <a:t>Reconstruir un argumento es escribirlo </a:t>
-            </a:r>
-            <a:r>
-              <a:rPr sz="2800" b="1">
-                <a:solidFill>
-                  <a:srgbClr val="1F2A44"/>
-                </a:solidFill>
-                <a:latin typeface="Nunito Sans"/>
-              </a:rPr>
-              <a:t>ordenado</a:t>
-            </a:r>
-            <a:r>
-              <a:rPr sz="2800" b="1">
-                <a:solidFill>
-                  <a:srgbClr val="1F2A44"/>
-                </a:solidFill>
-                <a:latin typeface="Nunito Sans"/>
-              </a:rPr>
-              <a:t>: premisas arriba, conclusión abajo.</a:t>
+              <a:t>Creer algo solo porque lo dice alguien importante o famoso, aunque no sea experto en ese tema.</a:t>
             </a:r>
           </a:p>
         </p:txBody>
@@ -7465,13 +6805,22 @@
               <a:t>• </a:t>
             </a:r>
             <a:r>
+              <a:rPr sz="2800" b="0">
+                <a:solidFill>
+                  <a:srgbClr val="1F2A44"/>
+                </a:solidFill>
+                <a:latin typeface="Nunito Sans"/>
+              </a:rPr>
+              <a:t>Recuerda: una </a:t>
+            </a:r>
+            <a:r>
               <a:rPr sz="2800" b="1">
                 <a:solidFill>
                   <a:srgbClr val="1F2A44"/>
                 </a:solidFill>
                 <a:latin typeface="Nunito Sans"/>
               </a:rPr>
-              <a:t>P1, P2…</a:t>
+              <a:t>falacia</a:t>
             </a:r>
             <a:r>
               <a:rPr sz="2800" b="0">
@@ -7480,7 +6829,7 @@
                 </a:solidFill>
                 <a:latin typeface="Nunito Sans"/>
               </a:rPr>
-              <a:t> = las premisas</a:t>
+              <a:t> parece un buen argumento y no lo es</a:t>
             </a:r>
           </a:p>
           <a:p>
@@ -7505,7 +6854,25 @@
                 </a:solidFill>
                 <a:latin typeface="Nunito Sans"/>
               </a:rPr>
-              <a:t>Una raya las separa</a:t>
+              <a:t>Fiarse de un experto </a:t>
+            </a:r>
+            <a:r>
+              <a:rPr sz="2800" b="1">
+                <a:solidFill>
+                  <a:srgbClr val="1F2A44"/>
+                </a:solidFill>
+                <a:latin typeface="Nunito Sans"/>
+              </a:rPr>
+              <a:t>de verdad</a:t>
+            </a:r>
+            <a:r>
+              <a:rPr sz="2800" b="0">
+                <a:solidFill>
+                  <a:srgbClr val="1F2A44"/>
+                </a:solidFill>
+                <a:latin typeface="Nunito Sans"/>
+              </a:rPr>
+              <a:t>, en su campo, no es falacia</a:t>
             </a:r>
           </a:p>
           <a:p>
@@ -7524,13 +6891,22 @@
               <a:t>• </a:t>
             </a:r>
             <a:r>
+              <a:rPr sz="2800" b="0">
+                <a:solidFill>
+                  <a:srgbClr val="1F2A44"/>
+                </a:solidFill>
+                <a:latin typeface="Nunito Sans"/>
+              </a:rPr>
+              <a:t>El fallo es fiarse </a:t>
+            </a:r>
+            <a:r>
               <a:rPr sz="2800" b="1">
                 <a:solidFill>
                   <a:srgbClr val="1F2A44"/>
                 </a:solidFill>
                 <a:latin typeface="Nunito Sans"/>
               </a:rPr>
-              <a:t>C</a:t>
+              <a:t>sin mirar</a:t>
             </a:r>
             <a:r>
               <a:rPr sz="2800" b="0">
@@ -7539,7 +6915,7 @@
                 </a:solidFill>
                 <a:latin typeface="Nunito Sans"/>
               </a:rPr>
-              <a:t> = la conclusión</a:t>
+              <a:t> las cuatro preguntas</a:t>
             </a:r>
           </a:p>
         </p:txBody>
@@ -7604,7 +6980,7 @@
                 </a:solidFill>
                 <a:latin typeface="Nunito Sans"/>
               </a:rPr>
-              <a:t>BLOQUE 1 · ORDENAR UN ARGUMENTO</a:t>
+              <a:t>BLOQUE 1 · QUÉ ES LA FALACIA DE AUTORIDAD</a:t>
             </a:r>
           </a:p>
         </p:txBody>
@@ -7643,7 +7019,7 @@
                 </a:solidFill>
                 <a:latin typeface="Fredoka"/>
               </a:rPr>
-              <a:t>Cuatro pasos para reconstruir</a:t>
+              <a:t>Tres trucos de la falacia de autoridad</a:t>
             </a:r>
           </a:p>
         </p:txBody>
@@ -7685,22 +7061,47 @@
               <a:t>• </a:t>
             </a:r>
             <a:r>
+              <a:rPr sz="2800" b="1">
+                <a:solidFill>
+                  <a:srgbClr val="1F2A44"/>
+                </a:solidFill>
+                <a:latin typeface="Nunito Sans"/>
+              </a:rPr>
+              <a:t>El famoso:</a:t>
+            </a:r>
+            <a:r>
               <a:rPr sz="2800" b="0">
                 <a:solidFill>
                   <a:srgbClr val="1F2A44"/>
                 </a:solidFill>
                 <a:latin typeface="Nunito Sans"/>
               </a:rPr>
-              <a:t>1. Busca la </a:t>
-            </a:r>
+              <a:t> un deportista o un influencer que opina de salud</a:t>
+            </a:r>
+          </a:p>
+          <a:p>
+            <a:pPr>
+              <a:spcAft>
+                <a:spcPts val="1260"/>
+              </a:spcAft>
+            </a:pPr>
             <a:r>
               <a:rPr sz="2800" b="1">
                 <a:solidFill>
+                  <a:srgbClr val="E8793A"/>
+                </a:solidFill>
+                <a:latin typeface="Nunito Sans"/>
+              </a:rPr>
+              <a:t>• </a:t>
+            </a:r>
+            <a:r>
+              <a:rPr sz="2800" b="1">
+                <a:solidFill>
                   <a:srgbClr val="1F2A44"/>
                 </a:solidFill>
                 <a:latin typeface="Nunito Sans"/>
               </a:rPr>
-              <a:t>conclusión</a:t>
+              <a:t>La bata blanca:</a:t>
             </a:r>
             <a:r>
               <a:rPr sz="2800" b="0">
@@ -7709,7 +7110,7 @@
                 </a:solidFill>
                 <a:latin typeface="Nunito Sans"/>
               </a:rPr>
-              <a:t>: ¿qué quiere que acepte?</a:t>
+              <a:t> alguien vestido de médico o de científico</a:t>
             </a:r>
           </a:p>
           <a:p>
@@ -7728,117 +7129,22 @@
               <a:t>• </a:t>
             </a:r>
             <a:r>
+              <a:rPr sz="2800" b="1">
+                <a:solidFill>
+                  <a:srgbClr val="1F2A44"/>
+                </a:solidFill>
+                <a:latin typeface="Nunito Sans"/>
+              </a:rPr>
+              <a:t>«Los expertos dicen»:</a:t>
+            </a:r>
+            <a:r>
               <a:rPr sz="2800" b="0">
                 <a:solidFill>
                   <a:srgbClr val="1F2A44"/>
                 </a:solidFill>
                 <a:latin typeface="Nunito Sans"/>
               </a:rPr>
-              <a:t>2. Busca las </a:t>
-            </a:r>
-            <a:r>
-              <a:rPr sz="2800" b="1">
-                <a:solidFill>
-                  <a:srgbClr val="1F2A44"/>
-                </a:solidFill>
-                <a:latin typeface="Nunito Sans"/>
-              </a:rPr>
-              <a:t>premisas</a:t>
-            </a:r>
-            <a:r>
-              <a:rPr sz="2800" b="0">
-                <a:solidFill>
-                  <a:srgbClr val="1F2A44"/>
-                </a:solidFill>
-                <a:latin typeface="Nunito Sans"/>
-              </a:rPr>
-              <a:t>: ¿qué da para apoyarlo?</a:t>
-            </a:r>
-          </a:p>
-          <a:p>
-            <a:pPr>
-              <a:spcAft>
-                <a:spcPts val="1260"/>
-              </a:spcAft>
-            </a:pPr>
-            <a:r>
-              <a:rPr sz="2800" b="1">
-                <a:solidFill>
-                  <a:srgbClr val="E8793A"/>
-                </a:solidFill>
-                <a:latin typeface="Nunito Sans"/>
-              </a:rPr>
-              <a:t>• </a:t>
-            </a:r>
-            <a:r>
-              <a:rPr sz="2800" b="0">
-                <a:solidFill>
-                  <a:srgbClr val="1F2A44"/>
-                </a:solidFill>
-                <a:latin typeface="Nunito Sans"/>
-              </a:rPr>
-              <a:t>3. Quita lo que </a:t>
-            </a:r>
-            <a:r>
-              <a:rPr sz="2800" b="1">
-                <a:solidFill>
-                  <a:srgbClr val="1F2A44"/>
-                </a:solidFill>
-                <a:latin typeface="Nunito Sans"/>
-              </a:rPr>
-              <a:t>sobra</a:t>
-            </a:r>
-            <a:r>
-              <a:rPr sz="2800" b="0">
-                <a:solidFill>
-                  <a:srgbClr val="1F2A44"/>
-                </a:solidFill>
-                <a:latin typeface="Nunito Sans"/>
-              </a:rPr>
-              <a:t>: adornos, repeticiones, insultos</a:t>
-            </a:r>
-          </a:p>
-          <a:p>
-            <a:pPr>
-              <a:spcAft>
-                <a:spcPts val="1260"/>
-              </a:spcAft>
-            </a:pPr>
-            <a:r>
-              <a:rPr sz="2800" b="1">
-                <a:solidFill>
-                  <a:srgbClr val="E8793A"/>
-                </a:solidFill>
-                <a:latin typeface="Nunito Sans"/>
-              </a:rPr>
-              <a:t>• </a:t>
-            </a:r>
-            <a:r>
-              <a:rPr sz="2800" b="0">
-                <a:solidFill>
-                  <a:srgbClr val="1F2A44"/>
-                </a:solidFill>
-                <a:latin typeface="Nunito Sans"/>
-              </a:rPr>
-              <a:t>4. Pregunta qué </a:t>
-            </a:r>
-            <a:r>
-              <a:rPr sz="2800" b="1">
-                <a:solidFill>
-                  <a:srgbClr val="1F2A44"/>
-                </a:solidFill>
-                <a:latin typeface="Nunito Sans"/>
-              </a:rPr>
-              <a:t>falta</a:t>
-            </a:r>
-            <a:r>
-              <a:rPr sz="2800" b="0">
-                <a:solidFill>
-                  <a:srgbClr val="1F2A44"/>
-                </a:solidFill>
-                <a:latin typeface="Nunito Sans"/>
-              </a:rPr>
-              <a:t>: ¿hay una premisa oculta?</a:t>
+              <a:t> expertos sin nombre y sin pruebas</a:t>
             </a:r>
           </a:p>
         </p:txBody>
@@ -7903,7 +7209,7 @@
                 </a:solidFill>
                 <a:latin typeface="Nunito Sans"/>
               </a:rPr>
-              <a:t>BLOQUE 1 · ORDENAR UN ARGUMENTO</a:t>
+              <a:t>BLOQUE 1 · QUÉ ES LA FALACIA DE AUTORIDAD</a:t>
             </a:r>
           </a:p>
         </p:txBody>
@@ -7942,7 +7248,7 @@
                 </a:solidFill>
                 <a:latin typeface="Fredoka"/>
               </a:rPr>
-              <a:t>Premisa oculta</a:t>
+              <a:t>Fiarse mal y fiarse bien</a:t>
             </a:r>
           </a:p>
         </p:txBody>
@@ -7956,13 +7262,13 @@
         <p:spPr>
           <a:xfrm>
             <a:off x="640000" y="1650000"/>
-            <a:ext cx="10912000" cy="1150000"/>
+            <a:ext cx="5306000" cy="4400000"/>
           </a:xfrm>
           <a:prstGeom prst="rect">
             <a:avLst/>
           </a:prstGeom>
           <a:solidFill>
-            <a:srgbClr val="EAF0F7"/>
+            <a:srgbClr val="FBE3D2"/>
           </a:solidFill>
           <a:ln>
             <a:noFill/>
@@ -7998,8 +7304,8 @@
         </p:nvSpPr>
         <p:spPr>
           <a:xfrm>
-            <a:off x="840000" y="1730000"/>
-            <a:ext cx="10512000" cy="1000000"/>
+            <a:off x="840000" y="1750000"/>
+            <a:ext cx="4906000" cy="600000"/>
           </a:xfrm>
           <a:prstGeom prst="rect">
             <a:avLst/>
@@ -8007,7 +7313,7 @@
           <a:noFill/>
         </p:spPr>
         <p:txBody>
-          <a:bodyPr wrap="square" anchor="ctr">
+          <a:bodyPr wrap="square">
             <a:spAutoFit/>
           </a:bodyPr>
           <a:lstStyle/>
@@ -8020,29 +7326,11 @@
             <a:r>
               <a:rPr sz="2800" b="1">
                 <a:solidFill>
-                  <a:srgbClr val="1F2A44"/>
-                </a:solidFill>
-                <a:latin typeface="Nunito Sans"/>
-              </a:rPr>
-              <a:t>Una premisa oculta es una razón que </a:t>
-            </a:r>
-            <a:r>
-              <a:rPr sz="2800" b="1">
-                <a:solidFill>
-                  <a:srgbClr val="1F2A44"/>
-                </a:solidFill>
-                <a:latin typeface="Nunito Sans"/>
-              </a:rPr>
-              <a:t>no se dice</a:t>
-            </a:r>
-            <a:r>
-              <a:rPr sz="2800" b="1">
-                <a:solidFill>
-                  <a:srgbClr val="1F2A44"/>
-                </a:solidFill>
-                <a:latin typeface="Nunito Sans"/>
-              </a:rPr>
-              <a:t>, pero que hace falta para llegar a la conclusión.</a:t>
+                  <a:srgbClr val="C2531C"/>
+                </a:solidFill>
+                <a:latin typeface="Nunito Sans"/>
+              </a:rPr>
+              <a:t>Falacia</a:t>
             </a:r>
           </a:p>
         </p:txBody>
@@ -8055,8 +7343,8 @@
         </p:nvSpPr>
         <p:spPr>
           <a:xfrm>
-            <a:off x="640000" y="3000000"/>
-            <a:ext cx="10912000" cy="3458000"/>
+            <a:off x="840000" y="2400000"/>
+            <a:ext cx="4906000" cy="3500000"/>
           </a:xfrm>
           <a:prstGeom prst="rect">
             <a:avLst/>
@@ -8071,12 +7359,192 @@
           <a:p>
             <a:pPr>
               <a:spcAft>
+                <a:spcPts val="1170"/>
+              </a:spcAft>
+            </a:pPr>
+            <a:r>
+              <a:rPr sz="2600" b="1">
+                <a:solidFill>
+                  <a:srgbClr val="E8793A"/>
+                </a:solidFill>
+                <a:latin typeface="Nunito Sans"/>
+              </a:rPr>
+              <a:t>• </a:t>
+            </a:r>
+            <a:r>
+              <a:rPr sz="2600" b="0">
+                <a:solidFill>
+                  <a:srgbClr val="1F2A44"/>
+                </a:solidFill>
+                <a:latin typeface="Nunito Sans"/>
+              </a:rPr>
+              <a:t>«Lo dice un futbolista, así que es sano»</a:t>
+            </a:r>
+          </a:p>
+          <a:p>
+            <a:pPr>
+              <a:spcAft>
+                <a:spcPts val="1170"/>
+              </a:spcAft>
+            </a:pPr>
+            <a:r>
+              <a:rPr sz="2600" b="1">
+                <a:solidFill>
+                  <a:srgbClr val="E8793A"/>
+                </a:solidFill>
+                <a:latin typeface="Nunito Sans"/>
+              </a:rPr>
+              <a:t>• </a:t>
+            </a:r>
+            <a:r>
+              <a:rPr sz="2600" b="0">
+                <a:solidFill>
+                  <a:srgbClr val="1F2A44"/>
+                </a:solidFill>
+                <a:latin typeface="Nunito Sans"/>
+              </a:rPr>
+              <a:t>«Un actor con bata lo recomienda»</a:t>
+            </a:r>
+          </a:p>
+          <a:p>
+            <a:pPr>
+              <a:spcAft>
+                <a:spcPts val="1170"/>
+              </a:spcAft>
+            </a:pPr>
+            <a:r>
+              <a:rPr sz="2600" b="1">
+                <a:solidFill>
+                  <a:srgbClr val="E8793A"/>
+                </a:solidFill>
+                <a:latin typeface="Nunito Sans"/>
+              </a:rPr>
+              <a:t>• </a:t>
+            </a:r>
+            <a:r>
+              <a:rPr sz="2600" b="0">
+                <a:solidFill>
+                  <a:srgbClr val="1F2A44"/>
+                </a:solidFill>
+                <a:latin typeface="Nunito Sans"/>
+              </a:rPr>
+              <a:t>«Los expertos dicen…» (¿quiénes?)</a:t>
+            </a:r>
+          </a:p>
+        </p:txBody>
+      </p:sp>
+      <p:sp>
+        <p:nvSpPr>
+          <p:cNvPr id="7" name="Rectangle 6"/>
+          <p:cNvSpPr/>
+          <p:nvPr/>
+        </p:nvSpPr>
+        <p:spPr>
+          <a:xfrm>
+            <a:off x="6246000" y="1650000"/>
+            <a:ext cx="5306000" cy="4400000"/>
+          </a:xfrm>
+          <a:prstGeom prst="rect">
+            <a:avLst/>
+          </a:prstGeom>
+          <a:solidFill>
+            <a:srgbClr val="EAF0F7"/>
+          </a:solidFill>
+          <a:ln>
+            <a:noFill/>
+          </a:ln>
+        </p:spPr>
+        <p:style>
+          <a:lnRef idx="1">
+            <a:schemeClr val="accent1"/>
+          </a:lnRef>
+          <a:fillRef idx="3">
+            <a:schemeClr val="accent1"/>
+          </a:fillRef>
+          <a:effectRef idx="2">
+            <a:schemeClr val="accent1"/>
+          </a:effectRef>
+          <a:fontRef idx="minor">
+            <a:schemeClr val="lt1"/>
+          </a:fontRef>
+        </p:style>
+        <p:txBody>
+          <a:bodyPr rtlCol="0" anchor="ctr"/>
+          <a:lstStyle/>
+          <a:p>
+            <a:pPr algn="ctr"/>
+          </a:p>
+        </p:txBody>
+      </p:sp>
+      <p:sp>
+        <p:nvSpPr>
+          <p:cNvPr id="8" name="TextBox 7"/>
+          <p:cNvSpPr txBox="1"/>
+          <p:nvPr/>
+        </p:nvSpPr>
+        <p:spPr>
+          <a:xfrm>
+            <a:off x="6446000" y="1750000"/>
+            <a:ext cx="4906000" cy="600000"/>
+          </a:xfrm>
+          <a:prstGeom prst="rect">
+            <a:avLst/>
+          </a:prstGeom>
+          <a:noFill/>
+        </p:spPr>
+        <p:txBody>
+          <a:bodyPr wrap="square">
+            <a:spAutoFit/>
+          </a:bodyPr>
+          <a:lstStyle/>
+          <a:p>
+            <a:pPr>
+              <a:spcAft>
                 <a:spcPts val="1260"/>
               </a:spcAft>
             </a:pPr>
             <a:r>
               <a:rPr sz="2800" b="1">
                 <a:solidFill>
+                  <a:srgbClr val="2F6FB5"/>
+                </a:solidFill>
+                <a:latin typeface="Nunito Sans"/>
+              </a:rPr>
+              <a:t>Buena razón</a:t>
+            </a:r>
+          </a:p>
+        </p:txBody>
+      </p:sp>
+      <p:sp>
+        <p:nvSpPr>
+          <p:cNvPr id="9" name="TextBox 8"/>
+          <p:cNvSpPr txBox="1"/>
+          <p:nvPr/>
+        </p:nvSpPr>
+        <p:spPr>
+          <a:xfrm>
+            <a:off x="6446000" y="2400000"/>
+            <a:ext cx="4906000" cy="3500000"/>
+          </a:xfrm>
+          <a:prstGeom prst="rect">
+            <a:avLst/>
+          </a:prstGeom>
+          <a:noFill/>
+        </p:spPr>
+        <p:txBody>
+          <a:bodyPr wrap="square">
+            <a:spAutoFit/>
+          </a:bodyPr>
+          <a:lstStyle/>
+          <a:p>
+            <a:pPr>
+              <a:spcAft>
+                <a:spcPts val="1170"/>
+              </a:spcAft>
+            </a:pPr>
+            <a:r>
+              <a:rPr sz="2600" b="1">
+                <a:solidFill>
                   <a:srgbClr val="E8793A"/>
                 </a:solidFill>
                 <a:latin typeface="Nunito Sans"/>
@@ -8084,32 +7552,48 @@
               <a:t>• </a:t>
             </a:r>
             <a:r>
-              <a:rPr sz="2800" b="0">
+              <a:rPr sz="2600" b="0">
                 <a:solidFill>
                   <a:srgbClr val="1F2A44"/>
                 </a:solidFill>
                 <a:latin typeface="Nunito Sans"/>
               </a:rPr>
-              <a:t>También se llama premisa </a:t>
-            </a:r>
-            <a:r>
-              <a:rPr sz="2800" b="1">
+              <a:t>«Lo dice mi médica, que me ha examinado»</a:t>
+            </a:r>
+          </a:p>
+          <a:p>
+            <a:pPr>
+              <a:spcAft>
+                <a:spcPts val="1170"/>
+              </a:spcAft>
+            </a:pPr>
+            <a:r>
+              <a:rPr sz="2600" b="1">
+                <a:solidFill>
+                  <a:srgbClr val="E8793A"/>
+                </a:solidFill>
+                <a:latin typeface="Nunito Sans"/>
+              </a:rPr>
+              <a:t>• </a:t>
+            </a:r>
+            <a:r>
+              <a:rPr sz="2600" b="0">
                 <a:solidFill>
                   <a:srgbClr val="1F2A44"/>
                 </a:solidFill>
                 <a:latin typeface="Nunito Sans"/>
               </a:rPr>
-              <a:t>implícita</a:t>
-            </a:r>
-          </a:p>
-          <a:p>
-            <a:pPr>
-              <a:spcAft>
-                <a:spcPts val="1260"/>
-              </a:spcAft>
-            </a:pPr>
-            <a:r>
-              <a:rPr sz="2800" b="1">
+              <a:t>«Lo dicen casi todos los expertos del tema»</a:t>
+            </a:r>
+          </a:p>
+          <a:p>
+            <a:pPr>
+              <a:spcAft>
+                <a:spcPts val="1170"/>
+              </a:spcAft>
+            </a:pPr>
+            <a:r>
+              <a:rPr sz="2600" b="1">
                 <a:solidFill>
                   <a:srgbClr val="E8793A"/>
                 </a:solidFill>
@@ -8118,38 +7602,13 @@
               <a:t>• </a:t>
             </a:r>
             <a:r>
-              <a:rPr sz="2800" b="0">
+              <a:rPr sz="2600" b="0">
                 <a:solidFill>
                   <a:srgbClr val="1F2A44"/>
                 </a:solidFill>
                 <a:latin typeface="Nunito Sans"/>
               </a:rPr>
-              <a:t>Pregunta: «¿qué tendría que ser verdad para que esto funcione?»</a:t>
-            </a:r>
-          </a:p>
-          <a:p>
-            <a:pPr>
-              <a:spcAft>
-                <a:spcPts val="1260"/>
-              </a:spcAft>
-            </a:pPr>
-            <a:r>
-              <a:rPr sz="2800" b="1">
-                <a:solidFill>
-                  <a:srgbClr val="E8793A"/>
-                </a:solidFill>
-                <a:latin typeface="Nunito Sans"/>
-              </a:rPr>
-              <a:t>• </a:t>
-            </a:r>
-            <a:r>
-              <a:rPr sz="2800" b="0">
-                <a:solidFill>
-                  <a:srgbClr val="1F2A44"/>
-                </a:solidFill>
-                <a:latin typeface="Nunito Sans"/>
-              </a:rPr>
-              <a:t>A veces es la parte más dudosa</a:t>
+              <a:t>«El estudio explica cómo lo midió»</a:t>
             </a:r>
           </a:p>
         </p:txBody>
